--- a/Task4/Лр4_Python Небоваренков Зверь Bubble_sort.pptx
+++ b/Task4/Лр4_Python Небоваренков Зверь Bubble_sort.pptx
@@ -205,7 +205,7 @@
           <a:p>
             <a:fld id="{3EFBAFB4-5510-574D-86CE-C19EF2B42204}" type="datetimeFigureOut">
               <a:rPr lang="ru-RU" smtClean="0"/>
-              <a:t>25.03.2026</a:t>
+              <a:t>26.03.2026</a:t>
             </a:fld>
             <a:endParaRPr lang="ru-RU"/>
           </a:p>
@@ -619,7 +619,7 @@
           <a:p>
             <a:fld id="{D90E282E-8406-E949-9BDA-3161F01F6A39}" type="datetime1">
               <a:rPr lang="ru-RU" smtClean="0"/>
-              <a:t>25.03.2026</a:t>
+              <a:t>26.03.2026</a:t>
             </a:fld>
             <a:endParaRPr lang="ru-RU"/>
           </a:p>
@@ -817,7 +817,7 @@
           <a:p>
             <a:fld id="{6DDB0DC4-518B-6845-83BC-0FF75AC396BA}" type="datetime1">
               <a:rPr lang="ru-RU" smtClean="0"/>
-              <a:t>25.03.2026</a:t>
+              <a:t>26.03.2026</a:t>
             </a:fld>
             <a:endParaRPr lang="ru-RU"/>
           </a:p>
@@ -1025,7 +1025,7 @@
           <a:p>
             <a:fld id="{5CEA9B2A-5F66-2444-8492-DF1C4D505A41}" type="datetime1">
               <a:rPr lang="ru-RU" smtClean="0"/>
-              <a:t>25.03.2026</a:t>
+              <a:t>26.03.2026</a:t>
             </a:fld>
             <a:endParaRPr lang="ru-RU"/>
           </a:p>
@@ -1223,7 +1223,7 @@
           <a:p>
             <a:fld id="{18B22137-869F-124E-AD6A-013DA00A3F47}" type="datetime1">
               <a:rPr lang="ru-RU" smtClean="0"/>
-              <a:t>25.03.2026</a:t>
+              <a:t>26.03.2026</a:t>
             </a:fld>
             <a:endParaRPr lang="ru-RU"/>
           </a:p>
@@ -1498,7 +1498,7 @@
           <a:p>
             <a:fld id="{73A8E1F7-411F-FC40-89DE-55DB480AAE63}" type="datetime1">
               <a:rPr lang="ru-RU" smtClean="0"/>
-              <a:t>25.03.2026</a:t>
+              <a:t>26.03.2026</a:t>
             </a:fld>
             <a:endParaRPr lang="ru-RU"/>
           </a:p>
@@ -1763,7 +1763,7 @@
           <a:p>
             <a:fld id="{331FFE0A-851A-A244-B1D2-4B5649C57CA6}" type="datetime1">
               <a:rPr lang="ru-RU" smtClean="0"/>
-              <a:t>25.03.2026</a:t>
+              <a:t>26.03.2026</a:t>
             </a:fld>
             <a:endParaRPr lang="ru-RU"/>
           </a:p>
@@ -2175,7 +2175,7 @@
           <a:p>
             <a:fld id="{9F7B008E-4B1B-C548-8956-97711596B574}" type="datetime1">
               <a:rPr lang="ru-RU" smtClean="0"/>
-              <a:t>25.03.2026</a:t>
+              <a:t>26.03.2026</a:t>
             </a:fld>
             <a:endParaRPr lang="ru-RU"/>
           </a:p>
@@ -2316,7 +2316,7 @@
           <a:p>
             <a:fld id="{74767300-804D-CF49-9DB0-3A0D159F127D}" type="datetime1">
               <a:rPr lang="ru-RU" smtClean="0"/>
-              <a:t>25.03.2026</a:t>
+              <a:t>26.03.2026</a:t>
             </a:fld>
             <a:endParaRPr lang="ru-RU"/>
           </a:p>
@@ -2429,7 +2429,7 @@
           <a:p>
             <a:fld id="{80146229-FC3F-EC48-AC78-1679AA1FEDCB}" type="datetime1">
               <a:rPr lang="ru-RU" smtClean="0"/>
-              <a:t>25.03.2026</a:t>
+              <a:t>26.03.2026</a:t>
             </a:fld>
             <a:endParaRPr lang="ru-RU"/>
           </a:p>
@@ -2740,7 +2740,7 @@
           <a:p>
             <a:fld id="{13706BD9-4DD2-7A45-84E4-A9AA7317B60B}" type="datetime1">
               <a:rPr lang="ru-RU" smtClean="0"/>
-              <a:t>25.03.2026</a:t>
+              <a:t>26.03.2026</a:t>
             </a:fld>
             <a:endParaRPr lang="ru-RU"/>
           </a:p>
@@ -3028,7 +3028,7 @@
           <a:p>
             <a:fld id="{B1697B00-35E3-9F48-AF56-B6CA106F8B38}" type="datetime1">
               <a:rPr lang="ru-RU" smtClean="0"/>
-              <a:t>25.03.2026</a:t>
+              <a:t>26.03.2026</a:t>
             </a:fld>
             <a:endParaRPr lang="ru-RU"/>
           </a:p>
@@ -3269,7 +3269,7 @@
           <a:p>
             <a:fld id="{04D7C91E-D92D-154E-A5B5-4C0C70C715C8}" type="datetime1">
               <a:rPr lang="ru-RU" smtClean="0"/>
-              <a:t>25.03.2026</a:t>
+              <a:t>26.03.2026</a:t>
             </a:fld>
             <a:endParaRPr lang="ru-RU"/>
           </a:p>
@@ -3940,6 +3940,50 @@
           </a:p>
         </p:txBody>
       </p:sp>
+      <p:sp>
+        <p:nvSpPr>
+          <p:cNvPr id="5" name="Заголовок 1">
+            <a:extLst>
+              <a:ext uri="{FF2B5EF4-FFF2-40B4-BE49-F238E27FC236}">
+                <a16:creationId xmlns:a16="http://schemas.microsoft.com/office/drawing/2014/main" id="{552E4423-0B3B-C26A-23A8-9CAE68A7682F}"/>
+              </a:ext>
+            </a:extLst>
+          </p:cNvPr>
+          <p:cNvSpPr>
+            <a:spLocks noGrp="1"/>
+          </p:cNvSpPr>
+          <p:nvPr>
+            <p:ph type="title"/>
+          </p:nvPr>
+        </p:nvSpPr>
+        <p:spPr>
+          <a:xfrm>
+            <a:off x="949960" y="111351"/>
+            <a:ext cx="9855200" cy="1325563"/>
+          </a:xfrm>
+        </p:spPr>
+        <p:txBody>
+          <a:bodyPr/>
+          <a:lstStyle/>
+          <a:p>
+            <a:r>
+              <a:rPr lang="ru-RU" sz="4400" dirty="0">
+                <a:latin typeface="Times New Roman" panose="02020603050405020304" pitchFamily="18" charset="0"/>
+                <a:cs typeface="Times New Roman" panose="02020603050405020304" pitchFamily="18" charset="0"/>
+              </a:rPr>
+              <a:t>Конвертация в </a:t>
+            </a:r>
+            <a:r>
+              <a:rPr lang="en-US" sz="4400" dirty="0">
+                <a:latin typeface="Times New Roman" panose="02020603050405020304" pitchFamily="18" charset="0"/>
+                <a:cs typeface="Times New Roman" panose="02020603050405020304" pitchFamily="18" charset="0"/>
+              </a:rPr>
+              <a:t>Python</a:t>
+            </a:r>
+            <a:endParaRPr lang="ru-RU" dirty="0"/>
+          </a:p>
+        </p:txBody>
+      </p:sp>
     </p:spTree>
     <p:extLst>
       <p:ext uri="{BB962C8B-B14F-4D97-AF65-F5344CB8AC3E}">
@@ -4344,7 +4388,7 @@
             </a:r>
             <a:r>
               <a:rPr lang="ru-RU" dirty="0"/>
-              <a:t>на С(</a:t>
+              <a:t>на С (</a:t>
             </a:r>
             <a:r>
               <a:rPr lang="en-US" dirty="0"/>
@@ -5218,7 +5262,7 @@
                 <a:latin typeface="Times New Roman" panose="02020603050405020304" pitchFamily="18" charset="0"/>
                 <a:cs typeface="Times New Roman" panose="02020603050405020304" pitchFamily="18" charset="0"/>
               </a:rPr>
-              <a:t>.text - </a:t>
+              <a:t>.text – </a:t>
             </a:r>
             <a:r>
               <a:rPr lang="ru-RU" sz="2400" dirty="0">
@@ -5594,7 +5638,7 @@
           </a:bodyPr>
           <a:lstStyle/>
           <a:p>
-            <a:pPr marL="0" indent="0">
+            <a:pPr marL="0" indent="0" algn="just">
               <a:buNone/>
             </a:pPr>
             <a:r>
@@ -5613,13 +5657,16 @@
               <a:rPr lang="en" dirty="0"/>
               <a:t>exe.</a:t>
             </a:r>
-            <a:br>
-              <a:rPr lang="en" dirty="0"/>
-            </a:br>
+            <a:endParaRPr lang="ru-RU" dirty="0"/>
+          </a:p>
+          <a:p>
+            <a:pPr marL="0" indent="0" algn="just">
+              <a:buNone/>
+            </a:pPr>
             <a:endParaRPr lang="en" dirty="0"/>
           </a:p>
           <a:p>
-            <a:pPr marL="0" indent="0">
+            <a:pPr marL="0" indent="0" algn="just">
               <a:buNone/>
             </a:pPr>
             <a:r>
@@ -5644,12 +5691,12 @@
             </a:r>
           </a:p>
           <a:p>
-            <a:pPr marL="0" indent="0">
+            <a:pPr marL="0" indent="0" algn="just">
               <a:buNone/>
             </a:pPr>
             <a:r>
               <a:rPr lang="ru-RU" dirty="0"/>
-              <a:t>Таким образом, установлено, что анализ </a:t>
+              <a:t>Установлено, что анализ </a:t>
             </a:r>
             <a:r>
               <a:rPr lang="en" dirty="0"/>

--- a/Task4/Лр4_Python Небоваренков Зверь Bubble_sort.pptx
+++ b/Task4/Лр4_Python Небоваренков Зверь Bubble_sort.pptx
@@ -5,18 +5,19 @@
     <p:sldMasterId id="2147483648" r:id="rId1"/>
   </p:sldMasterIdLst>
   <p:notesMasterIdLst>
-    <p:notesMasterId r:id="rId11"/>
+    <p:notesMasterId r:id="rId12"/>
   </p:notesMasterIdLst>
   <p:sldIdLst>
     <p:sldId id="272" r:id="rId2"/>
-    <p:sldId id="270" r:id="rId3"/>
-    <p:sldId id="271" r:id="rId4"/>
-    <p:sldId id="258" r:id="rId5"/>
-    <p:sldId id="259" r:id="rId6"/>
-    <p:sldId id="260" r:id="rId7"/>
-    <p:sldId id="261" r:id="rId8"/>
-    <p:sldId id="264" r:id="rId9"/>
-    <p:sldId id="277" r:id="rId10"/>
+    <p:sldId id="278" r:id="rId3"/>
+    <p:sldId id="270" r:id="rId4"/>
+    <p:sldId id="271" r:id="rId5"/>
+    <p:sldId id="258" r:id="rId6"/>
+    <p:sldId id="259" r:id="rId7"/>
+    <p:sldId id="260" r:id="rId8"/>
+    <p:sldId id="261" r:id="rId9"/>
+    <p:sldId id="264" r:id="rId10"/>
+    <p:sldId id="277" r:id="rId11"/>
   </p:sldIdLst>
   <p:sldSz cx="12192000" cy="6858000"/>
   <p:notesSz cx="6858000" cy="9144000"/>
@@ -116,6 +117,56 @@
     </a:lvl9pPr>
   </p:defaultTextStyle>
   <p:extLst>
+    <p:ext uri="{521415D9-36F7-43E2-AB2F-B90AF26B5E84}">
+      <p14:sectionLst xmlns:p14="http://schemas.microsoft.com/office/powerpoint/2010/main">
+        <p14:section name="Раздел по умолчанию" id="{A54C1B5F-F321-48E8-BE9D-B190756398D8}">
+          <p14:sldIdLst>
+            <p14:sldId id="272"/>
+            <p14:sldId id="278"/>
+          </p14:sldIdLst>
+        </p14:section>
+        <p14:section name="Конвертация в Python" id="{E1654F75-A787-43E6-957A-5C8F8AB93CE2}">
+          <p14:sldIdLst>
+            <p14:sldId id="270"/>
+          </p14:sldIdLst>
+        </p14:section>
+        <p14:section name="Конечный текст на языке Python" id="{CD91A59A-C9C6-4C23-AE1F-D7F803AFF3FE}">
+          <p14:sldIdLst>
+            <p14:sldId id="271"/>
+          </p14:sldIdLst>
+        </p14:section>
+        <p14:section name="Binary ninja и Сutter" id="{ABB460B9-7EF0-4A4A-8D11-5019D85E71A3}">
+          <p14:sldIdLst>
+            <p14:sldId id="258"/>
+          </p14:sldIdLst>
+        </p14:section>
+        <p14:section name="Dis" id="{FECCD938-E688-42D2-A58B-76D95F399FEE}">
+          <p14:sldIdLst>
+            <p14:sldId id="259"/>
+          </p14:sldIdLst>
+        </p14:section>
+        <p14:section name="Bubble_sort «псевдо» ассемблер" id="{664573A3-7BF3-4A6E-8A83-1A06FEDB67AE}">
+          <p14:sldIdLst>
+            <p14:sldId id="260"/>
+          </p14:sldIdLst>
+        </p14:section>
+        <p14:section name="Bubble_sort декомпиляция" id="{CEF37B74-CC57-4B55-9322-E501BD01088F}">
+          <p14:sldIdLst>
+            <p14:sldId id="261"/>
+          </p14:sldIdLst>
+        </p14:section>
+        <p14:section name="010 Editor " id="{0E800345-1A0D-4D1F-B8BC-2C6977C62245}">
+          <p14:sldIdLst>
+            <p14:sldId id="264"/>
+          </p14:sldIdLst>
+        </p14:section>
+        <p14:section name="Выводы" id="{52F90669-11F9-44EB-A710-639FBE192FCE}">
+          <p14:sldIdLst>
+            <p14:sldId id="277"/>
+          </p14:sldIdLst>
+        </p14:section>
+      </p14:sectionLst>
+    </p:ext>
     <p:ext uri="{EFAFB233-063F-42B5-8137-9DF3F51BA10A}">
       <p15:sldGuideLst xmlns:p15="http://schemas.microsoft.com/office/powerpoint/2012/main"/>
     </p:ext>
@@ -3820,6 +3871,215 @@
 </p:sld>
 </file>
 
+<file path=ppt/slides/slide10.xml><?xml version="1.0" encoding="utf-8"?>
+<p:sld xmlns:a="http://schemas.openxmlformats.org/drawingml/2006/main" xmlns:r="http://schemas.openxmlformats.org/officeDocument/2006/relationships" xmlns:p="http://schemas.openxmlformats.org/presentationml/2006/main">
+  <p:cSld>
+    <p:spTree>
+      <p:nvGrpSpPr>
+        <p:cNvPr id="1" name=""/>
+        <p:cNvGrpSpPr/>
+        <p:nvPr/>
+      </p:nvGrpSpPr>
+      <p:grpSpPr>
+        <a:xfrm>
+          <a:off x="0" y="0"/>
+          <a:ext cx="0" cy="0"/>
+          <a:chOff x="0" y="0"/>
+          <a:chExt cx="0" cy="0"/>
+        </a:xfrm>
+      </p:grpSpPr>
+      <p:sp>
+        <p:nvSpPr>
+          <p:cNvPr id="2" name="Title 1">
+            <a:extLst>
+              <a:ext uri="{FF2B5EF4-FFF2-40B4-BE49-F238E27FC236}">
+                <a16:creationId xmlns:a16="http://schemas.microsoft.com/office/drawing/2014/main" id="{2DAA243D-D83B-FC72-BCED-577224ACA22D}"/>
+              </a:ext>
+            </a:extLst>
+          </p:cNvPr>
+          <p:cNvSpPr>
+            <a:spLocks noGrp="1"/>
+          </p:cNvSpPr>
+          <p:nvPr>
+            <p:ph type="title"/>
+          </p:nvPr>
+        </p:nvSpPr>
+        <p:spPr/>
+        <p:txBody>
+          <a:bodyPr/>
+          <a:lstStyle/>
+          <a:p>
+            <a:r>
+              <a:rPr lang="ru-RU" dirty="0">
+                <a:latin typeface="Times New Roman" panose="02020603050405020304" pitchFamily="18" charset="0"/>
+                <a:cs typeface="Times New Roman" panose="02020603050405020304" pitchFamily="18" charset="0"/>
+              </a:rPr>
+              <a:t>Выводы</a:t>
+            </a:r>
+          </a:p>
+        </p:txBody>
+      </p:sp>
+      <p:sp>
+        <p:nvSpPr>
+          <p:cNvPr id="3" name="Content Placeholder 2">
+            <a:extLst>
+              <a:ext uri="{FF2B5EF4-FFF2-40B4-BE49-F238E27FC236}">
+                <a16:creationId xmlns:a16="http://schemas.microsoft.com/office/drawing/2014/main" id="{E9453449-04A0-2E7B-8E34-41811020A798}"/>
+              </a:ext>
+            </a:extLst>
+          </p:cNvPr>
+          <p:cNvSpPr>
+            <a:spLocks noGrp="1"/>
+          </p:cNvSpPr>
+          <p:nvPr>
+            <p:ph idx="1"/>
+          </p:nvPr>
+        </p:nvSpPr>
+        <p:spPr/>
+        <p:txBody>
+          <a:bodyPr>
+            <a:normAutofit fontScale="92500" lnSpcReduction="10000"/>
+          </a:bodyPr>
+          <a:lstStyle/>
+          <a:p>
+            <a:pPr marL="0" indent="0" algn="just">
+              <a:buNone/>
+            </a:pPr>
+            <a:r>
+              <a:rPr lang="ru-RU" dirty="0"/>
+              <a:t>В ходе выполнения лабораторной работы был проведён анализ </a:t>
+            </a:r>
+            <a:r>
+              <a:rPr lang="en" dirty="0"/>
+              <a:t>Python-</a:t>
+            </a:r>
+            <a:r>
+              <a:rPr lang="ru-RU" dirty="0"/>
+              <a:t>программы, преобразованной и упакованной в исполняемый файл формата .</a:t>
+            </a:r>
+            <a:r>
+              <a:rPr lang="en" dirty="0"/>
+              <a:t>exe.</a:t>
+            </a:r>
+            <a:endParaRPr lang="ru-RU" dirty="0"/>
+          </a:p>
+          <a:p>
+            <a:pPr marL="0" indent="0" algn="just">
+              <a:buNone/>
+            </a:pPr>
+            <a:endParaRPr lang="en" dirty="0"/>
+          </a:p>
+          <a:p>
+            <a:pPr marL="0" indent="0" algn="just">
+              <a:buNone/>
+            </a:pPr>
+            <a:r>
+              <a:rPr lang="ru-RU" dirty="0"/>
+              <a:t>При исследовании исполняемого файла с использованием </a:t>
+            </a:r>
+            <a:r>
+              <a:rPr lang="en" dirty="0"/>
+              <a:t>Binary Ninja </a:t>
+            </a:r>
+            <a:r>
+              <a:rPr lang="ru-RU" dirty="0"/>
+              <a:t>установлено, что основная часть кода относится к загрузчику </a:t>
+            </a:r>
+            <a:r>
+              <a:rPr lang="en" dirty="0"/>
+              <a:t>PyInstaller, </a:t>
+            </a:r>
+            <a:r>
+              <a:rPr lang="ru-RU" dirty="0"/>
+              <a:t>обеспечивающему запуск программы. Пользовательская логика при этом не представлена напрямую в машинном коде.</a:t>
+            </a:r>
+          </a:p>
+          <a:p>
+            <a:pPr marL="0" indent="0" algn="just">
+              <a:buNone/>
+            </a:pPr>
+            <a:r>
+              <a:rPr lang="ru-RU" dirty="0"/>
+              <a:t>Установлено, что анализ </a:t>
+            </a:r>
+            <a:r>
+              <a:rPr lang="en" dirty="0"/>
+              <a:t>Python-</a:t>
+            </a:r>
+            <a:r>
+              <a:rPr lang="ru-RU" dirty="0"/>
+              <a:t>программы, упакованной в .</a:t>
+            </a:r>
+            <a:r>
+              <a:rPr lang="en" dirty="0"/>
+              <a:t>exe, </a:t>
+            </a:r>
+            <a:r>
+              <a:rPr lang="ru-RU" dirty="0"/>
+              <a:t>требует извлечения и декомпиляции </a:t>
+            </a:r>
+            <a:r>
+              <a:rPr lang="ru-RU" dirty="0" err="1"/>
+              <a:t>байткода</a:t>
+            </a:r>
+            <a:r>
+              <a:rPr lang="ru-RU" dirty="0"/>
+              <a:t>, поскольку пользовательская логика не представлена напрямую в бинарном виде.</a:t>
+            </a:r>
+          </a:p>
+          <a:p>
+            <a:pPr marL="0" indent="0" algn="just">
+              <a:buNone/>
+            </a:pPr>
+            <a:endParaRPr lang="ru-RU" sz="2800" dirty="0">
+              <a:latin typeface="Times New Roman" panose="02020603050405020304" pitchFamily="18" charset="0"/>
+              <a:cs typeface="Times New Roman" panose="02020603050405020304" pitchFamily="18" charset="0"/>
+            </a:endParaRPr>
+          </a:p>
+        </p:txBody>
+      </p:sp>
+      <p:sp>
+        <p:nvSpPr>
+          <p:cNvPr id="5" name="Номер слайда 4">
+            <a:extLst>
+              <a:ext uri="{FF2B5EF4-FFF2-40B4-BE49-F238E27FC236}">
+                <a16:creationId xmlns:a16="http://schemas.microsoft.com/office/drawing/2014/main" id="{9FA118D6-8476-0CC9-F9BB-E3C3F50B261C}"/>
+              </a:ext>
+            </a:extLst>
+          </p:cNvPr>
+          <p:cNvSpPr>
+            <a:spLocks noGrp="1"/>
+          </p:cNvSpPr>
+          <p:nvPr>
+            <p:ph type="sldNum" sz="quarter" idx="12"/>
+          </p:nvPr>
+        </p:nvSpPr>
+        <p:spPr/>
+        <p:txBody>
+          <a:bodyPr/>
+          <a:lstStyle/>
+          <a:p>
+            <a:fld id="{5E132034-01A0-7847-98A4-B83C6CAD07E4}" type="slidenum">
+              <a:rPr lang="ru-RU" smtClean="0"/>
+              <a:t>10</a:t>
+            </a:fld>
+            <a:endParaRPr lang="ru-RU"/>
+          </a:p>
+        </p:txBody>
+      </p:sp>
+    </p:spTree>
+    <p:extLst>
+      <p:ext uri="{BB962C8B-B14F-4D97-AF65-F5344CB8AC3E}">
+        <p14:creationId xmlns:p14="http://schemas.microsoft.com/office/powerpoint/2010/main" val="3293851703"/>
+      </p:ext>
+    </p:extLst>
+  </p:cSld>
+  <p:clrMapOvr>
+    <a:masterClrMapping/>
+  </p:clrMapOvr>
+</p:sld>
+</file>
+
 <file path=ppt/slides/slide2.xml><?xml version="1.0" encoding="utf-8"?>
 <p:sld xmlns:a="http://schemas.openxmlformats.org/drawingml/2006/main" xmlns:r="http://schemas.openxmlformats.org/officeDocument/2006/relationships" xmlns:p="http://schemas.openxmlformats.org/presentationml/2006/main">
   <p:cSld>
@@ -3839,74 +4099,28 @@
       </p:grpSpPr>
       <p:sp>
         <p:nvSpPr>
-          <p:cNvPr id="3" name="Объект 2">
-            <a:extLst>
-              <a:ext uri="{FF2B5EF4-FFF2-40B4-BE49-F238E27FC236}">
-                <a16:creationId xmlns:a16="http://schemas.microsoft.com/office/drawing/2014/main" id="{11585769-B3AA-876A-EE51-AC18D3A32377}"/>
-              </a:ext>
-            </a:extLst>
-          </p:cNvPr>
-          <p:cNvSpPr>
-            <a:spLocks noGrp="1"/>
-          </p:cNvSpPr>
-          <p:nvPr>
-            <p:ph idx="1"/>
-          </p:nvPr>
-        </p:nvSpPr>
-        <p:spPr>
-          <a:xfrm>
-            <a:off x="838200" y="1436914"/>
-            <a:ext cx="10515600" cy="4740049"/>
-          </a:xfrm>
-        </p:spPr>
-        <p:txBody>
-          <a:bodyPr>
-            <a:normAutofit/>
-          </a:bodyPr>
-          <a:lstStyle/>
-          <a:p>
-            <a:pPr marL="0" indent="0">
-              <a:buNone/>
-            </a:pPr>
+          <p:cNvPr id="2" name="Заголовок 1">
+            <a:extLst>
+              <a:ext uri="{FF2B5EF4-FFF2-40B4-BE49-F238E27FC236}">
+                <a16:creationId xmlns:a16="http://schemas.microsoft.com/office/drawing/2014/main" id="{1ABF1E79-5123-9DF5-CD68-1441DBAA4AEC}"/>
+              </a:ext>
+            </a:extLst>
+          </p:cNvPr>
+          <p:cNvSpPr>
+            <a:spLocks noGrp="1"/>
+          </p:cNvSpPr>
+          <p:nvPr>
+            <p:ph type="title"/>
+          </p:nvPr>
+        </p:nvSpPr>
+        <p:spPr/>
+        <p:txBody>
+          <a:bodyPr/>
+          <a:lstStyle/>
+          <a:p>
             <a:r>
               <a:rPr lang="ru-RU" dirty="0"/>
-              <a:t>Исходные данные на языке </a:t>
-            </a:r>
-            <a:r>
-              <a:rPr lang="en" dirty="0"/>
-              <a:t>C++</a:t>
-            </a:r>
-            <a:br>
-              <a:rPr lang="en" dirty="0"/>
-            </a:br>
-            <a:r>
-              <a:rPr lang="ru-RU" dirty="0"/>
-              <a:t>В качестве исходных данных используется программное обеспечение из первой лабораторной работы, реализующее алгоритм сортировки пузырьком.</a:t>
-            </a:r>
-          </a:p>
-          <a:p>
-            <a:pPr marL="0" indent="0">
-              <a:buNone/>
-            </a:pPr>
-            <a:r>
-              <a:rPr lang="ru-RU" dirty="0"/>
-              <a:t>Для конвертации программного обеспечения в язык</a:t>
-            </a:r>
-            <a:r>
-              <a:rPr lang="en-US" dirty="0"/>
-              <a:t> Python</a:t>
-            </a:r>
-            <a:r>
-              <a:rPr lang="ru-RU" dirty="0"/>
-              <a:t> выполнялось с использованием искусственного интеллекта </a:t>
-            </a:r>
-            <a:r>
-              <a:rPr lang="en-US" dirty="0"/>
-              <a:t>Gemini 3 Pro. </a:t>
-            </a:r>
-            <a:r>
-              <a:rPr lang="ru-RU" dirty="0"/>
-              <a:t> </a:t>
+              <a:t>Оглавление</a:t>
             </a:r>
           </a:p>
         </p:txBody>
@@ -3916,7 +4130,7 @@
           <p:cNvPr id="4" name="Номер слайда 3">
             <a:extLst>
               <a:ext uri="{FF2B5EF4-FFF2-40B4-BE49-F238E27FC236}">
-                <a16:creationId xmlns:a16="http://schemas.microsoft.com/office/drawing/2014/main" id="{168892F5-261E-EFA2-E27B-9FF36F0660A4}"/>
+                <a16:creationId xmlns:a16="http://schemas.microsoft.com/office/drawing/2014/main" id="{DB7794D1-7D36-8907-302F-2C54ECCF07D3}"/>
               </a:ext>
             </a:extLst>
           </p:cNvPr>
@@ -3940,45 +4154,1263 @@
           </a:p>
         </p:txBody>
       </p:sp>
-      <p:sp>
-        <p:nvSpPr>
-          <p:cNvPr id="5" name="Заголовок 1">
-            <a:extLst>
-              <a:ext uri="{FF2B5EF4-FFF2-40B4-BE49-F238E27FC236}">
-                <a16:creationId xmlns:a16="http://schemas.microsoft.com/office/drawing/2014/main" id="{552E4423-0B3B-C26A-23A8-9CAE68A7682F}"/>
-              </a:ext>
-            </a:extLst>
-          </p:cNvPr>
-          <p:cNvSpPr>
-            <a:spLocks noGrp="1"/>
-          </p:cNvSpPr>
-          <p:nvPr>
-            <p:ph type="title"/>
-          </p:nvPr>
+      <mc:AlternateContent xmlns:mc="http://schemas.openxmlformats.org/markup-compatibility/2006">
+        <mc:Choice xmlns:pslz="http://schemas.microsoft.com/office/powerpoint/2016/slidezoom" Requires="pslz">
+          <p:graphicFrame>
+            <p:nvGraphicFramePr>
+              <p:cNvPr id="14" name="Ссылка на слайд 13">
+                <a:extLst>
+                  <a:ext uri="{FF2B5EF4-FFF2-40B4-BE49-F238E27FC236}">
+                    <a16:creationId xmlns:a16="http://schemas.microsoft.com/office/drawing/2014/main" id="{05F4F970-DBE7-3D6D-A7AC-197722E67620}"/>
+                  </a:ext>
+                </a:extLst>
+              </p:cNvPr>
+              <p:cNvGraphicFramePr>
+                <a:graphicFrameLocks noChangeAspect="1"/>
+              </p:cNvGraphicFramePr>
+              <p:nvPr>
+                <p:extLst>
+                  <p:ext uri="{D42A27DB-BD31-4B8C-83A1-F6EECF244321}">
+                    <p14:modId xmlns:p14="http://schemas.microsoft.com/office/powerpoint/2010/main" val="1922827661"/>
+                  </p:ext>
+                </p:extLst>
+              </p:nvPr>
+            </p:nvGraphicFramePr>
+            <p:xfrm>
+              <a:off x="838200" y="1451769"/>
+              <a:ext cx="1905000" cy="1071563"/>
+            </p:xfrm>
+            <a:graphic>
+              <a:graphicData uri="http://schemas.microsoft.com/office/powerpoint/2016/slidezoom">
+                <pslz:sldZm>
+                  <pslz:sldZmObj sldId="270" cId="1687853922">
+                    <pslz:zmPr id="{49AA218C-D906-451F-9A33-F9449BE3164D}" returnToParent="0" transitionDur="1000">
+                      <p166:blipFill xmlns:p166="http://schemas.microsoft.com/office/powerpoint/2016/6/main">
+                        <a:blip r:embed="rId2"/>
+                        <a:stretch>
+                          <a:fillRect/>
+                        </a:stretch>
+                      </p166:blipFill>
+                      <p166:spPr xmlns:p166="http://schemas.microsoft.com/office/powerpoint/2016/6/main">
+                        <a:xfrm>
+                          <a:off x="0" y="0"/>
+                          <a:ext cx="1905000" cy="1071563"/>
+                        </a:xfrm>
+                        <a:prstGeom prst="rect">
+                          <a:avLst/>
+                        </a:prstGeom>
+                        <a:ln w="3175">
+                          <a:solidFill>
+                            <a:prstClr val="ltGray"/>
+                          </a:solidFill>
+                        </a:ln>
+                      </p166:spPr>
+                    </pslz:zmPr>
+                  </pslz:sldZmObj>
+                </pslz:sldZm>
+              </a:graphicData>
+            </a:graphic>
+          </p:graphicFrame>
+        </mc:Choice>
+        <mc:Fallback>
+          <p:pic>
+            <p:nvPicPr>
+              <p:cNvPr id="14" name="Ссылка на слайд 13">
+                <a:hlinkClick r:id="rId3" action="ppaction://hlinksldjump"/>
+                <a:extLst>
+                  <a:ext uri="{FF2B5EF4-FFF2-40B4-BE49-F238E27FC236}">
+                    <a16:creationId xmlns:a16="http://schemas.microsoft.com/office/drawing/2014/main" id="{05F4F970-DBE7-3D6D-A7AC-197722E67620}"/>
+                  </a:ext>
+                </a:extLst>
+              </p:cNvPr>
+              <p:cNvPicPr>
+                <a:picLocks noGrp="1" noRot="1" noChangeAspect="1" noMove="1" noResize="1" noEditPoints="1" noAdjustHandles="1" noChangeArrowheads="1" noChangeShapeType="1"/>
+              </p:cNvPicPr>
+              <p:nvPr/>
+            </p:nvPicPr>
+            <p:blipFill>
+              <a:blip r:embed="rId2"/>
+              <a:stretch>
+                <a:fillRect/>
+              </a:stretch>
+            </p:blipFill>
+            <p:spPr>
+              <a:xfrm>
+                <a:off x="838200" y="1451769"/>
+                <a:ext cx="1905000" cy="1071563"/>
+              </a:xfrm>
+              <a:prstGeom prst="rect">
+                <a:avLst/>
+              </a:prstGeom>
+              <a:ln w="3175">
+                <a:solidFill>
+                  <a:prstClr val="ltGray"/>
+                </a:solidFill>
+              </a:ln>
+            </p:spPr>
+          </p:pic>
+        </mc:Fallback>
+      </mc:AlternateContent>
+      <mc:AlternateContent xmlns:mc="http://schemas.openxmlformats.org/markup-compatibility/2006">
+        <mc:Choice xmlns:pslz="http://schemas.microsoft.com/office/powerpoint/2016/slidezoom" Requires="pslz">
+          <p:graphicFrame>
+            <p:nvGraphicFramePr>
+              <p:cNvPr id="16" name="Ссылка на слайд 15">
+                <a:extLst>
+                  <a:ext uri="{FF2B5EF4-FFF2-40B4-BE49-F238E27FC236}">
+                    <a16:creationId xmlns:a16="http://schemas.microsoft.com/office/drawing/2014/main" id="{3126BF58-364E-5F11-B162-B0002280116D}"/>
+                  </a:ext>
+                </a:extLst>
+              </p:cNvPr>
+              <p:cNvGraphicFramePr>
+                <a:graphicFrameLocks noChangeAspect="1"/>
+              </p:cNvGraphicFramePr>
+              <p:nvPr>
+                <p:extLst>
+                  <p:ext uri="{D42A27DB-BD31-4B8C-83A1-F6EECF244321}">
+                    <p14:modId xmlns:p14="http://schemas.microsoft.com/office/powerpoint/2010/main" val="450285541"/>
+                  </p:ext>
+                </p:extLst>
+              </p:nvPr>
+            </p:nvGraphicFramePr>
+            <p:xfrm>
+              <a:off x="838200" y="2893218"/>
+              <a:ext cx="1905000" cy="1071563"/>
+            </p:xfrm>
+            <a:graphic>
+              <a:graphicData uri="http://schemas.microsoft.com/office/powerpoint/2016/slidezoom">
+                <pslz:sldZm>
+                  <pslz:sldZmObj sldId="271" cId="781240138">
+                    <pslz:zmPr id="{40C316A2-07F9-4CD1-8552-4B0BC27D8205}" returnToParent="0" transitionDur="1000">
+                      <p166:blipFill xmlns:p166="http://schemas.microsoft.com/office/powerpoint/2016/6/main">
+                        <a:blip r:embed="rId4"/>
+                        <a:stretch>
+                          <a:fillRect/>
+                        </a:stretch>
+                      </p166:blipFill>
+                      <p166:spPr xmlns:p166="http://schemas.microsoft.com/office/powerpoint/2016/6/main">
+                        <a:xfrm>
+                          <a:off x="0" y="0"/>
+                          <a:ext cx="1905000" cy="1071563"/>
+                        </a:xfrm>
+                        <a:prstGeom prst="rect">
+                          <a:avLst/>
+                        </a:prstGeom>
+                        <a:ln w="3175">
+                          <a:solidFill>
+                            <a:prstClr val="ltGray"/>
+                          </a:solidFill>
+                        </a:ln>
+                      </p166:spPr>
+                    </pslz:zmPr>
+                  </pslz:sldZmObj>
+                </pslz:sldZm>
+              </a:graphicData>
+            </a:graphic>
+          </p:graphicFrame>
+        </mc:Choice>
+        <mc:Fallback>
+          <p:pic>
+            <p:nvPicPr>
+              <p:cNvPr id="16" name="Ссылка на слайд 15">
+                <a:hlinkClick r:id="rId5" action="ppaction://hlinksldjump"/>
+                <a:extLst>
+                  <a:ext uri="{FF2B5EF4-FFF2-40B4-BE49-F238E27FC236}">
+                    <a16:creationId xmlns:a16="http://schemas.microsoft.com/office/drawing/2014/main" id="{3126BF58-364E-5F11-B162-B0002280116D}"/>
+                  </a:ext>
+                </a:extLst>
+              </p:cNvPr>
+              <p:cNvPicPr>
+                <a:picLocks noGrp="1" noRot="1" noChangeAspect="1" noMove="1" noResize="1" noEditPoints="1" noAdjustHandles="1" noChangeArrowheads="1" noChangeShapeType="1"/>
+              </p:cNvPicPr>
+              <p:nvPr/>
+            </p:nvPicPr>
+            <p:blipFill>
+              <a:blip r:embed="rId4"/>
+              <a:stretch>
+                <a:fillRect/>
+              </a:stretch>
+            </p:blipFill>
+            <p:spPr>
+              <a:xfrm>
+                <a:off x="838200" y="2893218"/>
+                <a:ext cx="1905000" cy="1071563"/>
+              </a:xfrm>
+              <a:prstGeom prst="rect">
+                <a:avLst/>
+              </a:prstGeom>
+              <a:ln w="3175">
+                <a:solidFill>
+                  <a:prstClr val="ltGray"/>
+                </a:solidFill>
+              </a:ln>
+            </p:spPr>
+          </p:pic>
+        </mc:Fallback>
+      </mc:AlternateContent>
+      <mc:AlternateContent xmlns:mc="http://schemas.openxmlformats.org/markup-compatibility/2006">
+        <mc:Choice xmlns:pslz="http://schemas.microsoft.com/office/powerpoint/2016/slidezoom" Requires="pslz">
+          <p:graphicFrame>
+            <p:nvGraphicFramePr>
+              <p:cNvPr id="18" name="Ссылка на слайд 17">
+                <a:extLst>
+                  <a:ext uri="{FF2B5EF4-FFF2-40B4-BE49-F238E27FC236}">
+                    <a16:creationId xmlns:a16="http://schemas.microsoft.com/office/drawing/2014/main" id="{BF6F2781-90C8-8CF8-430D-9451B558FF2A}"/>
+                  </a:ext>
+                </a:extLst>
+              </p:cNvPr>
+              <p:cNvGraphicFramePr>
+                <a:graphicFrameLocks noChangeAspect="1"/>
+              </p:cNvGraphicFramePr>
+              <p:nvPr>
+                <p:extLst>
+                  <p:ext uri="{D42A27DB-BD31-4B8C-83A1-F6EECF244321}">
+                    <p14:modId xmlns:p14="http://schemas.microsoft.com/office/powerpoint/2010/main" val="55164694"/>
+                  </p:ext>
+                </p:extLst>
+              </p:nvPr>
+            </p:nvGraphicFramePr>
+            <p:xfrm>
+              <a:off x="838200" y="4466590"/>
+              <a:ext cx="1905000" cy="1071563"/>
+            </p:xfrm>
+            <a:graphic>
+              <a:graphicData uri="http://schemas.microsoft.com/office/powerpoint/2016/slidezoom">
+                <pslz:sldZm>
+                  <pslz:sldZmObj sldId="258" cId="4286833755">
+                    <pslz:zmPr id="{B0BE43DC-2126-46F5-8246-4ECFDB580776}" returnToParent="0" transitionDur="1000">
+                      <p166:blipFill xmlns:p166="http://schemas.microsoft.com/office/powerpoint/2016/6/main">
+                        <a:blip r:embed="rId6"/>
+                        <a:stretch>
+                          <a:fillRect/>
+                        </a:stretch>
+                      </p166:blipFill>
+                      <p166:spPr xmlns:p166="http://schemas.microsoft.com/office/powerpoint/2016/6/main">
+                        <a:xfrm>
+                          <a:off x="0" y="0"/>
+                          <a:ext cx="1905000" cy="1071563"/>
+                        </a:xfrm>
+                        <a:prstGeom prst="rect">
+                          <a:avLst/>
+                        </a:prstGeom>
+                        <a:ln w="3175">
+                          <a:solidFill>
+                            <a:prstClr val="ltGray"/>
+                          </a:solidFill>
+                        </a:ln>
+                      </p166:spPr>
+                    </pslz:zmPr>
+                  </pslz:sldZmObj>
+                </pslz:sldZm>
+              </a:graphicData>
+            </a:graphic>
+          </p:graphicFrame>
+        </mc:Choice>
+        <mc:Fallback>
+          <p:pic>
+            <p:nvPicPr>
+              <p:cNvPr id="18" name="Ссылка на слайд 17">
+                <a:hlinkClick r:id="rId7" action="ppaction://hlinksldjump"/>
+                <a:extLst>
+                  <a:ext uri="{FF2B5EF4-FFF2-40B4-BE49-F238E27FC236}">
+                    <a16:creationId xmlns:a16="http://schemas.microsoft.com/office/drawing/2014/main" id="{BF6F2781-90C8-8CF8-430D-9451B558FF2A}"/>
+                  </a:ext>
+                </a:extLst>
+              </p:cNvPr>
+              <p:cNvPicPr>
+                <a:picLocks noGrp="1" noRot="1" noChangeAspect="1" noMove="1" noResize="1" noEditPoints="1" noAdjustHandles="1" noChangeArrowheads="1" noChangeShapeType="1"/>
+              </p:cNvPicPr>
+              <p:nvPr/>
+            </p:nvPicPr>
+            <p:blipFill>
+              <a:blip r:embed="rId6"/>
+              <a:stretch>
+                <a:fillRect/>
+              </a:stretch>
+            </p:blipFill>
+            <p:spPr>
+              <a:xfrm>
+                <a:off x="838200" y="4466590"/>
+                <a:ext cx="1905000" cy="1071563"/>
+              </a:xfrm>
+              <a:prstGeom prst="rect">
+                <a:avLst/>
+              </a:prstGeom>
+              <a:ln w="3175">
+                <a:solidFill>
+                  <a:prstClr val="ltGray"/>
+                </a:solidFill>
+              </a:ln>
+            </p:spPr>
+          </p:pic>
+        </mc:Fallback>
+      </mc:AlternateContent>
+      <mc:AlternateContent xmlns:mc="http://schemas.openxmlformats.org/markup-compatibility/2006">
+        <mc:Choice xmlns:pslz="http://schemas.microsoft.com/office/powerpoint/2016/slidezoom" Requires="pslz">
+          <p:graphicFrame>
+            <p:nvGraphicFramePr>
+              <p:cNvPr id="20" name="Ссылка на слайд 19">
+                <a:extLst>
+                  <a:ext uri="{FF2B5EF4-FFF2-40B4-BE49-F238E27FC236}">
+                    <a16:creationId xmlns:a16="http://schemas.microsoft.com/office/drawing/2014/main" id="{072D8B1C-825E-26AA-1D93-7C7D51980DF5}"/>
+                  </a:ext>
+                </a:extLst>
+              </p:cNvPr>
+              <p:cNvGraphicFramePr>
+                <a:graphicFrameLocks noChangeAspect="1"/>
+              </p:cNvGraphicFramePr>
+              <p:nvPr>
+                <p:extLst>
+                  <p:ext uri="{D42A27DB-BD31-4B8C-83A1-F6EECF244321}">
+                    <p14:modId xmlns:p14="http://schemas.microsoft.com/office/powerpoint/2010/main" val="2032268682"/>
+                  </p:ext>
+                </p:extLst>
+              </p:nvPr>
+            </p:nvGraphicFramePr>
+            <p:xfrm>
+              <a:off x="6954520" y="619126"/>
+              <a:ext cx="1503680" cy="845820"/>
+            </p:xfrm>
+            <a:graphic>
+              <a:graphicData uri="http://schemas.microsoft.com/office/powerpoint/2016/slidezoom">
+                <pslz:sldZm>
+                  <pslz:sldZmObj sldId="259" cId="3847853161">
+                    <pslz:zmPr id="{823F37A6-17FE-428E-BA9B-A8337983DDB3}" returnToParent="0" transitionDur="1000">
+                      <p166:blipFill xmlns:p166="http://schemas.microsoft.com/office/powerpoint/2016/6/main">
+                        <a:blip r:embed="rId8"/>
+                        <a:stretch>
+                          <a:fillRect/>
+                        </a:stretch>
+                      </p166:blipFill>
+                      <p166:spPr xmlns:p166="http://schemas.microsoft.com/office/powerpoint/2016/6/main">
+                        <a:xfrm>
+                          <a:off x="0" y="0"/>
+                          <a:ext cx="1503680" cy="845820"/>
+                        </a:xfrm>
+                        <a:prstGeom prst="rect">
+                          <a:avLst/>
+                        </a:prstGeom>
+                        <a:ln w="3175">
+                          <a:solidFill>
+                            <a:prstClr val="ltGray"/>
+                          </a:solidFill>
+                        </a:ln>
+                      </p166:spPr>
+                    </pslz:zmPr>
+                  </pslz:sldZmObj>
+                </pslz:sldZm>
+              </a:graphicData>
+            </a:graphic>
+          </p:graphicFrame>
+        </mc:Choice>
+        <mc:Fallback>
+          <p:pic>
+            <p:nvPicPr>
+              <p:cNvPr id="20" name="Ссылка на слайд 19">
+                <a:hlinkClick r:id="rId9" action="ppaction://hlinksldjump"/>
+                <a:extLst>
+                  <a:ext uri="{FF2B5EF4-FFF2-40B4-BE49-F238E27FC236}">
+                    <a16:creationId xmlns:a16="http://schemas.microsoft.com/office/drawing/2014/main" id="{072D8B1C-825E-26AA-1D93-7C7D51980DF5}"/>
+                  </a:ext>
+                </a:extLst>
+              </p:cNvPr>
+              <p:cNvPicPr>
+                <a:picLocks noGrp="1" noRot="1" noChangeAspect="1" noMove="1" noResize="1" noEditPoints="1" noAdjustHandles="1" noChangeArrowheads="1" noChangeShapeType="1"/>
+              </p:cNvPicPr>
+              <p:nvPr/>
+            </p:nvPicPr>
+            <p:blipFill>
+              <a:blip r:embed="rId8"/>
+              <a:stretch>
+                <a:fillRect/>
+              </a:stretch>
+            </p:blipFill>
+            <p:spPr>
+              <a:xfrm>
+                <a:off x="6954520" y="619126"/>
+                <a:ext cx="1503680" cy="845820"/>
+              </a:xfrm>
+              <a:prstGeom prst="rect">
+                <a:avLst/>
+              </a:prstGeom>
+              <a:ln w="3175">
+                <a:solidFill>
+                  <a:prstClr val="ltGray"/>
+                </a:solidFill>
+              </a:ln>
+            </p:spPr>
+          </p:pic>
+        </mc:Fallback>
+      </mc:AlternateContent>
+      <mc:AlternateContent xmlns:mc="http://schemas.openxmlformats.org/markup-compatibility/2006">
+        <mc:Choice xmlns:pslz="http://schemas.microsoft.com/office/powerpoint/2016/slidezoom" Requires="pslz">
+          <p:graphicFrame>
+            <p:nvGraphicFramePr>
+              <p:cNvPr id="22" name="Ссылка на слайд 21">
+                <a:extLst>
+                  <a:ext uri="{FF2B5EF4-FFF2-40B4-BE49-F238E27FC236}">
+                    <a16:creationId xmlns:a16="http://schemas.microsoft.com/office/drawing/2014/main" id="{BBF3A16D-666A-BAA4-F02C-F471AC634194}"/>
+                  </a:ext>
+                </a:extLst>
+              </p:cNvPr>
+              <p:cNvGraphicFramePr>
+                <a:graphicFrameLocks noChangeAspect="1"/>
+              </p:cNvGraphicFramePr>
+              <p:nvPr>
+                <p:extLst>
+                  <p:ext uri="{D42A27DB-BD31-4B8C-83A1-F6EECF244321}">
+                    <p14:modId xmlns:p14="http://schemas.microsoft.com/office/powerpoint/2010/main" val="3512223002"/>
+                  </p:ext>
+                </p:extLst>
+              </p:nvPr>
+            </p:nvGraphicFramePr>
+            <p:xfrm>
+              <a:off x="6954520" y="1869043"/>
+              <a:ext cx="1503680" cy="845820"/>
+            </p:xfrm>
+            <a:graphic>
+              <a:graphicData uri="http://schemas.microsoft.com/office/powerpoint/2016/slidezoom">
+                <pslz:sldZm>
+                  <pslz:sldZmObj sldId="260" cId="3669456100">
+                    <pslz:zmPr id="{F58885A0-9F45-4C6F-A938-36C22E8DA75E}" returnToParent="0" transitionDur="1000">
+                      <p166:blipFill xmlns:p166="http://schemas.microsoft.com/office/powerpoint/2016/6/main">
+                        <a:blip r:embed="rId10"/>
+                        <a:stretch>
+                          <a:fillRect/>
+                        </a:stretch>
+                      </p166:blipFill>
+                      <p166:spPr xmlns:p166="http://schemas.microsoft.com/office/powerpoint/2016/6/main">
+                        <a:xfrm>
+                          <a:off x="0" y="0"/>
+                          <a:ext cx="1503680" cy="845820"/>
+                        </a:xfrm>
+                        <a:prstGeom prst="rect">
+                          <a:avLst/>
+                        </a:prstGeom>
+                        <a:ln w="3175">
+                          <a:solidFill>
+                            <a:prstClr val="ltGray"/>
+                          </a:solidFill>
+                        </a:ln>
+                      </p166:spPr>
+                    </pslz:zmPr>
+                  </pslz:sldZmObj>
+                </pslz:sldZm>
+              </a:graphicData>
+            </a:graphic>
+          </p:graphicFrame>
+        </mc:Choice>
+        <mc:Fallback>
+          <p:pic>
+            <p:nvPicPr>
+              <p:cNvPr id="22" name="Ссылка на слайд 21">
+                <a:hlinkClick r:id="rId11" action="ppaction://hlinksldjump"/>
+                <a:extLst>
+                  <a:ext uri="{FF2B5EF4-FFF2-40B4-BE49-F238E27FC236}">
+                    <a16:creationId xmlns:a16="http://schemas.microsoft.com/office/drawing/2014/main" id="{BBF3A16D-666A-BAA4-F02C-F471AC634194}"/>
+                  </a:ext>
+                </a:extLst>
+              </p:cNvPr>
+              <p:cNvPicPr>
+                <a:picLocks noGrp="1" noRot="1" noChangeAspect="1" noMove="1" noResize="1" noEditPoints="1" noAdjustHandles="1" noChangeArrowheads="1" noChangeShapeType="1"/>
+              </p:cNvPicPr>
+              <p:nvPr/>
+            </p:nvPicPr>
+            <p:blipFill>
+              <a:blip r:embed="rId10"/>
+              <a:stretch>
+                <a:fillRect/>
+              </a:stretch>
+            </p:blipFill>
+            <p:spPr>
+              <a:xfrm>
+                <a:off x="6954520" y="1869043"/>
+                <a:ext cx="1503680" cy="845820"/>
+              </a:xfrm>
+              <a:prstGeom prst="rect">
+                <a:avLst/>
+              </a:prstGeom>
+              <a:ln w="3175">
+                <a:solidFill>
+                  <a:prstClr val="ltGray"/>
+                </a:solidFill>
+              </a:ln>
+            </p:spPr>
+          </p:pic>
+        </mc:Fallback>
+      </mc:AlternateContent>
+      <mc:AlternateContent xmlns:mc="http://schemas.openxmlformats.org/markup-compatibility/2006">
+        <mc:Choice xmlns:pslz="http://schemas.microsoft.com/office/powerpoint/2016/slidezoom" Requires="pslz">
+          <p:graphicFrame>
+            <p:nvGraphicFramePr>
+              <p:cNvPr id="24" name="Ссылка на слайд 23">
+                <a:extLst>
+                  <a:ext uri="{FF2B5EF4-FFF2-40B4-BE49-F238E27FC236}">
+                    <a16:creationId xmlns:a16="http://schemas.microsoft.com/office/drawing/2014/main" id="{AE54FD16-4355-04E1-EACB-59E8B924ADE2}"/>
+                  </a:ext>
+                </a:extLst>
+              </p:cNvPr>
+              <p:cNvGraphicFramePr>
+                <a:graphicFrameLocks noChangeAspect="1"/>
+              </p:cNvGraphicFramePr>
+              <p:nvPr>
+                <p:extLst>
+                  <p:ext uri="{D42A27DB-BD31-4B8C-83A1-F6EECF244321}">
+                    <p14:modId xmlns:p14="http://schemas.microsoft.com/office/powerpoint/2010/main" val="2278886413"/>
+                  </p:ext>
+                </p:extLst>
+              </p:nvPr>
+            </p:nvGraphicFramePr>
+            <p:xfrm>
+              <a:off x="6954519" y="3118960"/>
+              <a:ext cx="1503681" cy="845821"/>
+            </p:xfrm>
+            <a:graphic>
+              <a:graphicData uri="http://schemas.microsoft.com/office/powerpoint/2016/slidezoom">
+                <pslz:sldZm>
+                  <pslz:sldZmObj sldId="261" cId="1672358780">
+                    <pslz:zmPr id="{35CD89B9-7995-431D-8C96-A3F80363E8A0}" returnToParent="0" transitionDur="1000">
+                      <p166:blipFill xmlns:p166="http://schemas.microsoft.com/office/powerpoint/2016/6/main">
+                        <a:blip r:embed="rId12"/>
+                        <a:stretch>
+                          <a:fillRect/>
+                        </a:stretch>
+                      </p166:blipFill>
+                      <p166:spPr xmlns:p166="http://schemas.microsoft.com/office/powerpoint/2016/6/main">
+                        <a:xfrm>
+                          <a:off x="0" y="0"/>
+                          <a:ext cx="1503681" cy="845821"/>
+                        </a:xfrm>
+                        <a:prstGeom prst="rect">
+                          <a:avLst/>
+                        </a:prstGeom>
+                        <a:ln w="3175">
+                          <a:solidFill>
+                            <a:prstClr val="ltGray"/>
+                          </a:solidFill>
+                        </a:ln>
+                      </p166:spPr>
+                    </pslz:zmPr>
+                  </pslz:sldZmObj>
+                </pslz:sldZm>
+              </a:graphicData>
+            </a:graphic>
+          </p:graphicFrame>
+        </mc:Choice>
+        <mc:Fallback>
+          <p:pic>
+            <p:nvPicPr>
+              <p:cNvPr id="24" name="Ссылка на слайд 23">
+                <a:hlinkClick r:id="rId13" action="ppaction://hlinksldjump"/>
+                <a:extLst>
+                  <a:ext uri="{FF2B5EF4-FFF2-40B4-BE49-F238E27FC236}">
+                    <a16:creationId xmlns:a16="http://schemas.microsoft.com/office/drawing/2014/main" id="{AE54FD16-4355-04E1-EACB-59E8B924ADE2}"/>
+                  </a:ext>
+                </a:extLst>
+              </p:cNvPr>
+              <p:cNvPicPr>
+                <a:picLocks noGrp="1" noRot="1" noChangeAspect="1" noMove="1" noResize="1" noEditPoints="1" noAdjustHandles="1" noChangeArrowheads="1" noChangeShapeType="1"/>
+              </p:cNvPicPr>
+              <p:nvPr/>
+            </p:nvPicPr>
+            <p:blipFill>
+              <a:blip r:embed="rId12"/>
+              <a:stretch>
+                <a:fillRect/>
+              </a:stretch>
+            </p:blipFill>
+            <p:spPr>
+              <a:xfrm>
+                <a:off x="6954519" y="3118960"/>
+                <a:ext cx="1503681" cy="845821"/>
+              </a:xfrm>
+              <a:prstGeom prst="rect">
+                <a:avLst/>
+              </a:prstGeom>
+              <a:ln w="3175">
+                <a:solidFill>
+                  <a:prstClr val="ltGray"/>
+                </a:solidFill>
+              </a:ln>
+            </p:spPr>
+          </p:pic>
+        </mc:Fallback>
+      </mc:AlternateContent>
+      <mc:AlternateContent xmlns:mc="http://schemas.openxmlformats.org/markup-compatibility/2006">
+        <mc:Choice xmlns:pslz="http://schemas.microsoft.com/office/powerpoint/2016/slidezoom" Requires="pslz">
+          <p:graphicFrame>
+            <p:nvGraphicFramePr>
+              <p:cNvPr id="26" name="Ссылка на слайд 25">
+                <a:extLst>
+                  <a:ext uri="{FF2B5EF4-FFF2-40B4-BE49-F238E27FC236}">
+                    <a16:creationId xmlns:a16="http://schemas.microsoft.com/office/drawing/2014/main" id="{28EA121A-D39C-99EA-15E4-5C8359E3644F}"/>
+                  </a:ext>
+                </a:extLst>
+              </p:cNvPr>
+              <p:cNvGraphicFramePr>
+                <a:graphicFrameLocks noChangeAspect="1"/>
+              </p:cNvGraphicFramePr>
+              <p:nvPr>
+                <p:extLst>
+                  <p:ext uri="{D42A27DB-BD31-4B8C-83A1-F6EECF244321}">
+                    <p14:modId xmlns:p14="http://schemas.microsoft.com/office/powerpoint/2010/main" val="1609779434"/>
+                  </p:ext>
+                </p:extLst>
+              </p:nvPr>
+            </p:nvGraphicFramePr>
+            <p:xfrm>
+              <a:off x="6954519" y="4547232"/>
+              <a:ext cx="1503681" cy="845821"/>
+            </p:xfrm>
+            <a:graphic>
+              <a:graphicData uri="http://schemas.microsoft.com/office/powerpoint/2016/slidezoom">
+                <pslz:sldZm>
+                  <pslz:sldZmObj sldId="264" cId="4143863033">
+                    <pslz:zmPr id="{202A542C-3070-4B65-9A2A-BD49AFA256B7}" returnToParent="0" transitionDur="1000">
+                      <p166:blipFill xmlns:p166="http://schemas.microsoft.com/office/powerpoint/2016/6/main">
+                        <a:blip r:embed="rId14"/>
+                        <a:stretch>
+                          <a:fillRect/>
+                        </a:stretch>
+                      </p166:blipFill>
+                      <p166:spPr xmlns:p166="http://schemas.microsoft.com/office/powerpoint/2016/6/main">
+                        <a:xfrm>
+                          <a:off x="0" y="0"/>
+                          <a:ext cx="1503681" cy="845821"/>
+                        </a:xfrm>
+                        <a:prstGeom prst="rect">
+                          <a:avLst/>
+                        </a:prstGeom>
+                        <a:ln w="3175">
+                          <a:solidFill>
+                            <a:prstClr val="ltGray"/>
+                          </a:solidFill>
+                        </a:ln>
+                      </p166:spPr>
+                    </pslz:zmPr>
+                  </pslz:sldZmObj>
+                </pslz:sldZm>
+              </a:graphicData>
+            </a:graphic>
+          </p:graphicFrame>
+        </mc:Choice>
+        <mc:Fallback>
+          <p:pic>
+            <p:nvPicPr>
+              <p:cNvPr id="26" name="Ссылка на слайд 25">
+                <a:hlinkClick r:id="rId15" action="ppaction://hlinksldjump"/>
+                <a:extLst>
+                  <a:ext uri="{FF2B5EF4-FFF2-40B4-BE49-F238E27FC236}">
+                    <a16:creationId xmlns:a16="http://schemas.microsoft.com/office/drawing/2014/main" id="{28EA121A-D39C-99EA-15E4-5C8359E3644F}"/>
+                  </a:ext>
+                </a:extLst>
+              </p:cNvPr>
+              <p:cNvPicPr>
+                <a:picLocks noGrp="1" noRot="1" noChangeAspect="1" noMove="1" noResize="1" noEditPoints="1" noAdjustHandles="1" noChangeArrowheads="1" noChangeShapeType="1"/>
+              </p:cNvPicPr>
+              <p:nvPr/>
+            </p:nvPicPr>
+            <p:blipFill>
+              <a:blip r:embed="rId14"/>
+              <a:stretch>
+                <a:fillRect/>
+              </a:stretch>
+            </p:blipFill>
+            <p:spPr>
+              <a:xfrm>
+                <a:off x="6954519" y="4547232"/>
+                <a:ext cx="1503681" cy="845821"/>
+              </a:xfrm>
+              <a:prstGeom prst="rect">
+                <a:avLst/>
+              </a:prstGeom>
+              <a:ln w="3175">
+                <a:solidFill>
+                  <a:prstClr val="ltGray"/>
+                </a:solidFill>
+              </a:ln>
+            </p:spPr>
+          </p:pic>
+        </mc:Fallback>
+      </mc:AlternateContent>
+      <mc:AlternateContent xmlns:mc="http://schemas.openxmlformats.org/markup-compatibility/2006">
+        <mc:Choice xmlns:pslz="http://schemas.microsoft.com/office/powerpoint/2016/slidezoom" Requires="pslz">
+          <p:graphicFrame>
+            <p:nvGraphicFramePr>
+              <p:cNvPr id="28" name="Ссылка на слайд 27">
+                <a:extLst>
+                  <a:ext uri="{FF2B5EF4-FFF2-40B4-BE49-F238E27FC236}">
+                    <a16:creationId xmlns:a16="http://schemas.microsoft.com/office/drawing/2014/main" id="{F9DDFB49-126A-BEE0-1494-D9C1DC321781}"/>
+                  </a:ext>
+                </a:extLst>
+              </p:cNvPr>
+              <p:cNvGraphicFramePr>
+                <a:graphicFrameLocks noChangeAspect="1"/>
+              </p:cNvGraphicFramePr>
+              <p:nvPr>
+                <p:extLst>
+                  <p:ext uri="{D42A27DB-BD31-4B8C-83A1-F6EECF244321}">
+                    <p14:modId xmlns:p14="http://schemas.microsoft.com/office/powerpoint/2010/main" val="2238261435"/>
+                  </p:ext>
+                </p:extLst>
+              </p:nvPr>
+            </p:nvGraphicFramePr>
+            <p:xfrm>
+              <a:off x="6954519" y="5875653"/>
+              <a:ext cx="1503683" cy="845822"/>
+            </p:xfrm>
+            <a:graphic>
+              <a:graphicData uri="http://schemas.microsoft.com/office/powerpoint/2016/slidezoom">
+                <pslz:sldZm>
+                  <pslz:sldZmObj sldId="277" cId="3293851703">
+                    <pslz:zmPr id="{8EC029A8-8B99-4D08-B937-5D97B2D678B7}" returnToParent="0" transitionDur="1000">
+                      <p166:blipFill xmlns:p166="http://schemas.microsoft.com/office/powerpoint/2016/6/main">
+                        <a:blip r:embed="rId16"/>
+                        <a:stretch>
+                          <a:fillRect/>
+                        </a:stretch>
+                      </p166:blipFill>
+                      <p166:spPr xmlns:p166="http://schemas.microsoft.com/office/powerpoint/2016/6/main">
+                        <a:xfrm>
+                          <a:off x="0" y="0"/>
+                          <a:ext cx="1503683" cy="845822"/>
+                        </a:xfrm>
+                        <a:prstGeom prst="rect">
+                          <a:avLst/>
+                        </a:prstGeom>
+                        <a:ln w="3175">
+                          <a:solidFill>
+                            <a:prstClr val="ltGray"/>
+                          </a:solidFill>
+                        </a:ln>
+                      </p166:spPr>
+                    </pslz:zmPr>
+                  </pslz:sldZmObj>
+                </pslz:sldZm>
+              </a:graphicData>
+            </a:graphic>
+          </p:graphicFrame>
+        </mc:Choice>
+        <mc:Fallback>
+          <p:pic>
+            <p:nvPicPr>
+              <p:cNvPr id="28" name="Ссылка на слайд 27">
+                <a:hlinkClick r:id="rId17" action="ppaction://hlinksldjump"/>
+                <a:extLst>
+                  <a:ext uri="{FF2B5EF4-FFF2-40B4-BE49-F238E27FC236}">
+                    <a16:creationId xmlns:a16="http://schemas.microsoft.com/office/drawing/2014/main" id="{F9DDFB49-126A-BEE0-1494-D9C1DC321781}"/>
+                  </a:ext>
+                </a:extLst>
+              </p:cNvPr>
+              <p:cNvPicPr>
+                <a:picLocks noGrp="1" noRot="1" noChangeAspect="1" noMove="1" noResize="1" noEditPoints="1" noAdjustHandles="1" noChangeArrowheads="1" noChangeShapeType="1"/>
+              </p:cNvPicPr>
+              <p:nvPr/>
+            </p:nvPicPr>
+            <p:blipFill>
+              <a:blip r:embed="rId16"/>
+              <a:stretch>
+                <a:fillRect/>
+              </a:stretch>
+            </p:blipFill>
+            <p:spPr>
+              <a:xfrm>
+                <a:off x="6954519" y="5875653"/>
+                <a:ext cx="1503683" cy="845822"/>
+              </a:xfrm>
+              <a:prstGeom prst="rect">
+                <a:avLst/>
+              </a:prstGeom>
+              <a:ln w="3175">
+                <a:solidFill>
+                  <a:prstClr val="ltGray"/>
+                </a:solidFill>
+              </a:ln>
+            </p:spPr>
+          </p:pic>
+        </mc:Fallback>
+      </mc:AlternateContent>
+      <p:sp>
+        <p:nvSpPr>
+          <p:cNvPr id="30" name="TextBox 29">
+            <a:extLst>
+              <a:ext uri="{FF2B5EF4-FFF2-40B4-BE49-F238E27FC236}">
+                <a16:creationId xmlns:a16="http://schemas.microsoft.com/office/drawing/2014/main" id="{29F64E23-DAD7-6C20-D8AF-142C91B0D827}"/>
+              </a:ext>
+            </a:extLst>
+          </p:cNvPr>
+          <p:cNvSpPr txBox="1"/>
+          <p:nvPr/>
         </p:nvSpPr>
         <p:spPr>
           <a:xfrm>
-            <a:off x="949960" y="111351"/>
-            <a:ext cx="9855200" cy="1325563"/>
+            <a:off x="2743200" y="1828800"/>
+            <a:ext cx="3683000" cy="369332"/>
           </a:xfrm>
+          <a:prstGeom prst="rect">
+            <a:avLst/>
+          </a:prstGeom>
+          <a:noFill/>
         </p:spPr>
         <p:txBody>
-          <a:bodyPr/>
-          <a:lstStyle/>
-          <a:p>
-            <a:r>
-              <a:rPr lang="ru-RU" sz="4400" dirty="0">
+          <a:bodyPr wrap="square" rtlCol="0">
+            <a:spAutoFit/>
+          </a:bodyPr>
+          <a:lstStyle/>
+          <a:p>
+            <a:r>
+              <a:rPr lang="ru-RU" dirty="0"/>
+              <a:t>Слайд 3 </a:t>
+            </a:r>
+            <a:r>
+              <a:rPr lang="ru-RU" dirty="0">
+                <a:sym typeface="Symbol" panose="05050102010706020507" pitchFamily="18" charset="2"/>
+              </a:rPr>
+              <a:t> Конвертация в </a:t>
+            </a:r>
+            <a:r>
+              <a:rPr lang="en-US" dirty="0">
+                <a:sym typeface="Symbol" panose="05050102010706020507" pitchFamily="18" charset="2"/>
+              </a:rPr>
+              <a:t>Python</a:t>
+            </a:r>
+            <a:endParaRPr lang="ru-RU" dirty="0"/>
+          </a:p>
+        </p:txBody>
+      </p:sp>
+      <p:sp>
+        <p:nvSpPr>
+          <p:cNvPr id="32" name="TextBox 31">
+            <a:extLst>
+              <a:ext uri="{FF2B5EF4-FFF2-40B4-BE49-F238E27FC236}">
+                <a16:creationId xmlns:a16="http://schemas.microsoft.com/office/drawing/2014/main" id="{94EFFFA9-F58C-D35B-64F1-21C6E257D437}"/>
+              </a:ext>
+            </a:extLst>
+          </p:cNvPr>
+          <p:cNvSpPr txBox="1"/>
+          <p:nvPr/>
+        </p:nvSpPr>
+        <p:spPr>
+          <a:xfrm>
+            <a:off x="2788920" y="3218704"/>
+            <a:ext cx="3683000" cy="646331"/>
+          </a:xfrm>
+          <a:prstGeom prst="rect">
+            <a:avLst/>
+          </a:prstGeom>
+          <a:noFill/>
+        </p:spPr>
+        <p:txBody>
+          <a:bodyPr wrap="square" rtlCol="0">
+            <a:spAutoFit/>
+          </a:bodyPr>
+          <a:lstStyle/>
+          <a:p>
+            <a:r>
+              <a:rPr lang="ru-RU" dirty="0"/>
+              <a:t>Слайд </a:t>
+            </a:r>
+            <a:r>
+              <a:rPr lang="en-US" dirty="0"/>
+              <a:t>4</a:t>
+            </a:r>
+            <a:r>
+              <a:rPr lang="ru-RU" dirty="0"/>
+              <a:t> </a:t>
+            </a:r>
+            <a:r>
+              <a:rPr lang="ru-RU" dirty="0">
+                <a:sym typeface="Symbol" panose="05050102010706020507" pitchFamily="18" charset="2"/>
+              </a:rPr>
+              <a:t> </a:t>
+            </a:r>
+            <a:r>
+              <a:rPr lang="ru-RU" dirty="0"/>
+              <a:t>Конечный текст на языке </a:t>
+            </a:r>
+            <a:r>
+              <a:rPr lang="en" dirty="0"/>
+              <a:t>Python</a:t>
+            </a:r>
+            <a:endParaRPr lang="ru-RU" dirty="0"/>
+          </a:p>
+        </p:txBody>
+      </p:sp>
+      <p:sp>
+        <p:nvSpPr>
+          <p:cNvPr id="33" name="TextBox 32">
+            <a:extLst>
+              <a:ext uri="{FF2B5EF4-FFF2-40B4-BE49-F238E27FC236}">
+                <a16:creationId xmlns:a16="http://schemas.microsoft.com/office/drawing/2014/main" id="{6395FFD6-5B78-B0C8-F4D9-4415B350985C}"/>
+              </a:ext>
+            </a:extLst>
+          </p:cNvPr>
+          <p:cNvSpPr txBox="1"/>
+          <p:nvPr/>
+        </p:nvSpPr>
+        <p:spPr>
+          <a:xfrm>
+            <a:off x="2788920" y="4817705"/>
+            <a:ext cx="3683000" cy="369332"/>
+          </a:xfrm>
+          <a:prstGeom prst="rect">
+            <a:avLst/>
+          </a:prstGeom>
+          <a:noFill/>
+        </p:spPr>
+        <p:txBody>
+          <a:bodyPr wrap="square" rtlCol="0">
+            <a:spAutoFit/>
+          </a:bodyPr>
+          <a:lstStyle/>
+          <a:p>
+            <a:r>
+              <a:rPr lang="ru-RU" dirty="0"/>
+              <a:t>Слайд </a:t>
+            </a:r>
+            <a:r>
+              <a:rPr lang="en-US" dirty="0"/>
+              <a:t>5</a:t>
+            </a:r>
+            <a:r>
+              <a:rPr lang="ru-RU" dirty="0"/>
+              <a:t> </a:t>
+            </a:r>
+            <a:r>
+              <a:rPr lang="ru-RU" dirty="0">
+                <a:sym typeface="Symbol" panose="05050102010706020507" pitchFamily="18" charset="2"/>
+              </a:rPr>
+              <a:t></a:t>
+            </a:r>
+            <a:r>
+              <a:rPr lang="en" dirty="0"/>
+              <a:t>Binary ninja</a:t>
+            </a:r>
+            <a:r>
+              <a:rPr lang="ru-RU" dirty="0"/>
+              <a:t> и С</a:t>
+            </a:r>
+            <a:r>
+              <a:rPr lang="en-US" dirty="0"/>
+              <a:t>utter</a:t>
+            </a:r>
+            <a:endParaRPr lang="ru-RU" dirty="0"/>
+          </a:p>
+        </p:txBody>
+      </p:sp>
+      <p:sp>
+        <p:nvSpPr>
+          <p:cNvPr id="34" name="TextBox 33">
+            <a:extLst>
+              <a:ext uri="{FF2B5EF4-FFF2-40B4-BE49-F238E27FC236}">
+                <a16:creationId xmlns:a16="http://schemas.microsoft.com/office/drawing/2014/main" id="{05514634-E647-F413-FFEE-E866C9A3493D}"/>
+              </a:ext>
+            </a:extLst>
+          </p:cNvPr>
+          <p:cNvSpPr txBox="1"/>
+          <p:nvPr/>
+        </p:nvSpPr>
+        <p:spPr>
+          <a:xfrm>
+            <a:off x="8458200" y="841812"/>
+            <a:ext cx="3683000" cy="369332"/>
+          </a:xfrm>
+          <a:prstGeom prst="rect">
+            <a:avLst/>
+          </a:prstGeom>
+          <a:noFill/>
+        </p:spPr>
+        <p:txBody>
+          <a:bodyPr wrap="square" rtlCol="0">
+            <a:spAutoFit/>
+          </a:bodyPr>
+          <a:lstStyle/>
+          <a:p>
+            <a:r>
+              <a:rPr lang="ru-RU" dirty="0"/>
+              <a:t>Слайд </a:t>
+            </a:r>
+            <a:r>
+              <a:rPr lang="en-US" dirty="0"/>
+              <a:t>6</a:t>
+            </a:r>
+            <a:r>
+              <a:rPr lang="ru-RU" dirty="0"/>
+              <a:t> </a:t>
+            </a:r>
+            <a:r>
+              <a:rPr lang="ru-RU" dirty="0">
+                <a:sym typeface="Symbol" panose="05050102010706020507" pitchFamily="18" charset="2"/>
+              </a:rPr>
+              <a:t></a:t>
+            </a:r>
+            <a:r>
+              <a:rPr lang="en-US" dirty="0">
+                <a:sym typeface="Symbol" panose="05050102010706020507" pitchFamily="18" charset="2"/>
+              </a:rPr>
+              <a:t> </a:t>
+            </a:r>
+            <a:r>
+              <a:rPr lang="en-US" dirty="0"/>
+              <a:t>Dis</a:t>
+            </a:r>
+            <a:endParaRPr lang="ru-RU" dirty="0"/>
+          </a:p>
+        </p:txBody>
+      </p:sp>
+      <p:sp>
+        <p:nvSpPr>
+          <p:cNvPr id="35" name="TextBox 34">
+            <a:extLst>
+              <a:ext uri="{FF2B5EF4-FFF2-40B4-BE49-F238E27FC236}">
+                <a16:creationId xmlns:a16="http://schemas.microsoft.com/office/drawing/2014/main" id="{C3554433-45EF-C760-8787-DEFEB99175E0}"/>
+              </a:ext>
+            </a:extLst>
+          </p:cNvPr>
+          <p:cNvSpPr txBox="1"/>
+          <p:nvPr/>
+        </p:nvSpPr>
+        <p:spPr>
+          <a:xfrm>
+            <a:off x="8422640" y="1968787"/>
+            <a:ext cx="3683000" cy="646331"/>
+          </a:xfrm>
+          <a:prstGeom prst="rect">
+            <a:avLst/>
+          </a:prstGeom>
+          <a:noFill/>
+        </p:spPr>
+        <p:txBody>
+          <a:bodyPr wrap="square" rtlCol="0">
+            <a:spAutoFit/>
+          </a:bodyPr>
+          <a:lstStyle/>
+          <a:p>
+            <a:r>
+              <a:rPr lang="ru-RU" dirty="0"/>
+              <a:t>Слайд </a:t>
+            </a:r>
+            <a:r>
+              <a:rPr lang="en-US" dirty="0"/>
+              <a:t>7</a:t>
+            </a:r>
+            <a:r>
+              <a:rPr lang="ru-RU" dirty="0"/>
+              <a:t> </a:t>
+            </a:r>
+            <a:r>
+              <a:rPr lang="ru-RU" dirty="0">
+                <a:sym typeface="Symbol" panose="05050102010706020507" pitchFamily="18" charset="2"/>
+              </a:rPr>
+              <a:t></a:t>
+            </a:r>
+            <a:r>
+              <a:rPr lang="en-US" dirty="0">
+                <a:sym typeface="Symbol" panose="05050102010706020507" pitchFamily="18" charset="2"/>
+              </a:rPr>
+              <a:t> </a:t>
+            </a:r>
+            <a:r>
+              <a:rPr lang="en-US" dirty="0"/>
+              <a:t>Bubble_sort </a:t>
+            </a:r>
+            <a:r>
+              <a:rPr lang="ru-RU" dirty="0"/>
+              <a:t>«псевдо» ассемблер</a:t>
+            </a:r>
+          </a:p>
+        </p:txBody>
+      </p:sp>
+      <p:sp>
+        <p:nvSpPr>
+          <p:cNvPr id="36" name="TextBox 35">
+            <a:hlinkClick r:id="rId13" action="ppaction://hlinksldjump"/>
+            <a:extLst>
+              <a:ext uri="{FF2B5EF4-FFF2-40B4-BE49-F238E27FC236}">
+                <a16:creationId xmlns:a16="http://schemas.microsoft.com/office/drawing/2014/main" id="{4B3BA7B7-3757-52B7-BDE5-E8283EDEAE5C}"/>
+              </a:ext>
+            </a:extLst>
+          </p:cNvPr>
+          <p:cNvSpPr txBox="1"/>
+          <p:nvPr/>
+        </p:nvSpPr>
+        <p:spPr>
+          <a:xfrm>
+            <a:off x="8422640" y="3196618"/>
+            <a:ext cx="3683000" cy="646331"/>
+          </a:xfrm>
+          <a:prstGeom prst="rect">
+            <a:avLst/>
+          </a:prstGeom>
+          <a:noFill/>
+        </p:spPr>
+        <p:txBody>
+          <a:bodyPr wrap="square" rtlCol="0">
+            <a:spAutoFit/>
+          </a:bodyPr>
+          <a:lstStyle/>
+          <a:p>
+            <a:r>
+              <a:rPr lang="ru-RU" dirty="0"/>
+              <a:t>Слайд </a:t>
+            </a:r>
+            <a:r>
+              <a:rPr lang="en-US" dirty="0"/>
+              <a:t>8</a:t>
+            </a:r>
+            <a:r>
+              <a:rPr lang="ru-RU" dirty="0"/>
+              <a:t> </a:t>
+            </a:r>
+            <a:r>
+              <a:rPr lang="ru-RU" dirty="0">
+                <a:sym typeface="Symbol" panose="05050102010706020507" pitchFamily="18" charset="2"/>
+              </a:rPr>
+              <a:t></a:t>
+            </a:r>
+            <a:r>
+              <a:rPr lang="en-US" dirty="0">
+                <a:sym typeface="Symbol" panose="05050102010706020507" pitchFamily="18" charset="2"/>
+              </a:rPr>
+              <a:t> </a:t>
+            </a:r>
+            <a:r>
+              <a:rPr lang="en-US" dirty="0">
                 <a:latin typeface="Times New Roman" panose="02020603050405020304" pitchFamily="18" charset="0"/>
                 <a:cs typeface="Times New Roman" panose="02020603050405020304" pitchFamily="18" charset="0"/>
               </a:rPr>
-              <a:t>Конвертация в </a:t>
-            </a:r>
-            <a:r>
-              <a:rPr lang="en-US" sz="4400" dirty="0">
+              <a:t>Bubble_sort </a:t>
+            </a:r>
+            <a:r>
+              <a:rPr lang="ru-RU" dirty="0">
                 <a:latin typeface="Times New Roman" panose="02020603050405020304" pitchFamily="18" charset="0"/>
                 <a:cs typeface="Times New Roman" panose="02020603050405020304" pitchFamily="18" charset="0"/>
               </a:rPr>
-              <a:t>Python</a:t>
+              <a:t>декомпиляция</a:t>
+            </a:r>
+            <a:endParaRPr lang="ru-RU" dirty="0"/>
+          </a:p>
+        </p:txBody>
+      </p:sp>
+      <p:sp>
+        <p:nvSpPr>
+          <p:cNvPr id="37" name="TextBox 36">
+            <a:hlinkClick r:id="rId13" action="ppaction://hlinksldjump"/>
+            <a:extLst>
+              <a:ext uri="{FF2B5EF4-FFF2-40B4-BE49-F238E27FC236}">
+                <a16:creationId xmlns:a16="http://schemas.microsoft.com/office/drawing/2014/main" id="{0D033724-01BC-A2B4-DE05-D05E80B29D2E}"/>
+              </a:ext>
+            </a:extLst>
+          </p:cNvPr>
+          <p:cNvSpPr txBox="1"/>
+          <p:nvPr/>
+        </p:nvSpPr>
+        <p:spPr>
+          <a:xfrm>
+            <a:off x="8458200" y="4817705"/>
+            <a:ext cx="3683000" cy="369332"/>
+          </a:xfrm>
+          <a:prstGeom prst="rect">
+            <a:avLst/>
+          </a:prstGeom>
+          <a:noFill/>
+        </p:spPr>
+        <p:txBody>
+          <a:bodyPr wrap="square" rtlCol="0">
+            <a:spAutoFit/>
+          </a:bodyPr>
+          <a:lstStyle/>
+          <a:p>
+            <a:r>
+              <a:rPr lang="ru-RU" dirty="0"/>
+              <a:t>Слайд </a:t>
+            </a:r>
+            <a:r>
+              <a:rPr lang="en-US" dirty="0"/>
+              <a:t>9</a:t>
+            </a:r>
+            <a:r>
+              <a:rPr lang="ru-RU" dirty="0"/>
+              <a:t> </a:t>
+            </a:r>
+            <a:r>
+              <a:rPr lang="ru-RU" dirty="0">
+                <a:sym typeface="Symbol" panose="05050102010706020507" pitchFamily="18" charset="2"/>
+              </a:rPr>
+              <a:t></a:t>
+            </a:r>
+            <a:r>
+              <a:rPr lang="en-US" dirty="0">
+                <a:sym typeface="Symbol" panose="05050102010706020507" pitchFamily="18" charset="2"/>
+              </a:rPr>
+              <a:t> </a:t>
+            </a:r>
+            <a:r>
+              <a:rPr lang="en-US" dirty="0"/>
+              <a:t>010 Editor</a:t>
+            </a:r>
+            <a:endParaRPr lang="ru-RU" dirty="0"/>
+          </a:p>
+        </p:txBody>
+      </p:sp>
+      <p:sp>
+        <p:nvSpPr>
+          <p:cNvPr id="38" name="TextBox 37">
+            <a:hlinkClick r:id="rId13" action="ppaction://hlinksldjump"/>
+            <a:extLst>
+              <a:ext uri="{FF2B5EF4-FFF2-40B4-BE49-F238E27FC236}">
+                <a16:creationId xmlns:a16="http://schemas.microsoft.com/office/drawing/2014/main" id="{C2BA4378-86B7-4761-0833-B630A20CA83D}"/>
+              </a:ext>
+            </a:extLst>
+          </p:cNvPr>
+          <p:cNvSpPr txBox="1"/>
+          <p:nvPr/>
+        </p:nvSpPr>
+        <p:spPr>
+          <a:xfrm>
+            <a:off x="8458200" y="6113898"/>
+            <a:ext cx="3683000" cy="369332"/>
+          </a:xfrm>
+          <a:prstGeom prst="rect">
+            <a:avLst/>
+          </a:prstGeom>
+          <a:noFill/>
+        </p:spPr>
+        <p:txBody>
+          <a:bodyPr wrap="square" rtlCol="0">
+            <a:spAutoFit/>
+          </a:bodyPr>
+          <a:lstStyle/>
+          <a:p>
+            <a:r>
+              <a:rPr lang="ru-RU" dirty="0"/>
+              <a:t>Слайд </a:t>
+            </a:r>
+            <a:r>
+              <a:rPr lang="en-US" dirty="0"/>
+              <a:t>10</a:t>
+            </a:r>
+            <a:r>
+              <a:rPr lang="ru-RU" dirty="0"/>
+              <a:t> </a:t>
+            </a:r>
+            <a:r>
+              <a:rPr lang="ru-RU" dirty="0">
+                <a:sym typeface="Symbol" panose="05050102010706020507" pitchFamily="18" charset="2"/>
+              </a:rPr>
+              <a:t></a:t>
+            </a:r>
+            <a:r>
+              <a:rPr lang="en-US" dirty="0">
+                <a:sym typeface="Symbol" panose="05050102010706020507" pitchFamily="18" charset="2"/>
+              </a:rPr>
+              <a:t> </a:t>
+            </a:r>
+            <a:r>
+              <a:rPr lang="ru-RU" dirty="0">
+                <a:sym typeface="Symbol" panose="05050102010706020507" pitchFamily="18" charset="2"/>
+              </a:rPr>
+              <a:t>Выводы</a:t>
             </a:r>
             <a:endParaRPr lang="ru-RU" dirty="0"/>
           </a:p>
@@ -3987,7 +5419,7 @@
     </p:spTree>
     <p:extLst>
       <p:ext uri="{BB962C8B-B14F-4D97-AF65-F5344CB8AC3E}">
-        <p14:creationId xmlns:p14="http://schemas.microsoft.com/office/powerpoint/2010/main" val="1687853922"/>
+        <p14:creationId xmlns:p14="http://schemas.microsoft.com/office/powerpoint/2010/main" val="3239169867"/>
       </p:ext>
     </p:extLst>
   </p:cSld>
@@ -4016,6 +5448,183 @@
       </p:grpSpPr>
       <p:sp>
         <p:nvSpPr>
+          <p:cNvPr id="3" name="Объект 2">
+            <a:extLst>
+              <a:ext uri="{FF2B5EF4-FFF2-40B4-BE49-F238E27FC236}">
+                <a16:creationId xmlns:a16="http://schemas.microsoft.com/office/drawing/2014/main" id="{11585769-B3AA-876A-EE51-AC18D3A32377}"/>
+              </a:ext>
+            </a:extLst>
+          </p:cNvPr>
+          <p:cNvSpPr>
+            <a:spLocks noGrp="1"/>
+          </p:cNvSpPr>
+          <p:nvPr>
+            <p:ph idx="1"/>
+          </p:nvPr>
+        </p:nvSpPr>
+        <p:spPr>
+          <a:xfrm>
+            <a:off x="838200" y="1436914"/>
+            <a:ext cx="10515600" cy="4740049"/>
+          </a:xfrm>
+        </p:spPr>
+        <p:txBody>
+          <a:bodyPr>
+            <a:normAutofit/>
+          </a:bodyPr>
+          <a:lstStyle/>
+          <a:p>
+            <a:pPr marL="0" indent="0">
+              <a:buNone/>
+            </a:pPr>
+            <a:r>
+              <a:rPr lang="ru-RU" dirty="0"/>
+              <a:t>Исходные данные на языке </a:t>
+            </a:r>
+            <a:r>
+              <a:rPr lang="en" dirty="0"/>
+              <a:t>C++</a:t>
+            </a:r>
+            <a:br>
+              <a:rPr lang="en" dirty="0"/>
+            </a:br>
+            <a:r>
+              <a:rPr lang="ru-RU" dirty="0"/>
+              <a:t>В качестве исходных данных используется программное обеспечение из первой лабораторной работы, реализующее алгоритм сортировки пузырьком.</a:t>
+            </a:r>
+          </a:p>
+          <a:p>
+            <a:pPr marL="0" indent="0">
+              <a:buNone/>
+            </a:pPr>
+            <a:r>
+              <a:rPr lang="ru-RU" dirty="0"/>
+              <a:t>Для конвертации программного обеспечения в язык</a:t>
+            </a:r>
+            <a:r>
+              <a:rPr lang="en-US" dirty="0"/>
+              <a:t> Python</a:t>
+            </a:r>
+            <a:r>
+              <a:rPr lang="ru-RU" dirty="0"/>
+              <a:t> выполнялось с использованием искусственного интеллекта </a:t>
+            </a:r>
+            <a:r>
+              <a:rPr lang="en-US" dirty="0"/>
+              <a:t>Gemini 3 Pro. </a:t>
+            </a:r>
+            <a:r>
+              <a:rPr lang="ru-RU" dirty="0"/>
+              <a:t> </a:t>
+            </a:r>
+          </a:p>
+        </p:txBody>
+      </p:sp>
+      <p:sp>
+        <p:nvSpPr>
+          <p:cNvPr id="4" name="Номер слайда 3">
+            <a:extLst>
+              <a:ext uri="{FF2B5EF4-FFF2-40B4-BE49-F238E27FC236}">
+                <a16:creationId xmlns:a16="http://schemas.microsoft.com/office/drawing/2014/main" id="{168892F5-261E-EFA2-E27B-9FF36F0660A4}"/>
+              </a:ext>
+            </a:extLst>
+          </p:cNvPr>
+          <p:cNvSpPr>
+            <a:spLocks noGrp="1"/>
+          </p:cNvSpPr>
+          <p:nvPr>
+            <p:ph type="sldNum" sz="quarter" idx="12"/>
+          </p:nvPr>
+        </p:nvSpPr>
+        <p:spPr/>
+        <p:txBody>
+          <a:bodyPr/>
+          <a:lstStyle/>
+          <a:p>
+            <a:fld id="{5E132034-01A0-7847-98A4-B83C6CAD07E4}" type="slidenum">
+              <a:rPr lang="ru-RU" smtClean="0"/>
+              <a:t>3</a:t>
+            </a:fld>
+            <a:endParaRPr lang="ru-RU"/>
+          </a:p>
+        </p:txBody>
+      </p:sp>
+      <p:sp>
+        <p:nvSpPr>
+          <p:cNvPr id="5" name="Заголовок 1">
+            <a:extLst>
+              <a:ext uri="{FF2B5EF4-FFF2-40B4-BE49-F238E27FC236}">
+                <a16:creationId xmlns:a16="http://schemas.microsoft.com/office/drawing/2014/main" id="{552E4423-0B3B-C26A-23A8-9CAE68A7682F}"/>
+              </a:ext>
+            </a:extLst>
+          </p:cNvPr>
+          <p:cNvSpPr>
+            <a:spLocks noGrp="1"/>
+          </p:cNvSpPr>
+          <p:nvPr>
+            <p:ph type="title"/>
+          </p:nvPr>
+        </p:nvSpPr>
+        <p:spPr>
+          <a:xfrm>
+            <a:off x="949960" y="111351"/>
+            <a:ext cx="9855200" cy="1325563"/>
+          </a:xfrm>
+        </p:spPr>
+        <p:txBody>
+          <a:bodyPr/>
+          <a:lstStyle/>
+          <a:p>
+            <a:r>
+              <a:rPr lang="ru-RU" sz="4400" dirty="0">
+                <a:latin typeface="Times New Roman" panose="02020603050405020304" pitchFamily="18" charset="0"/>
+                <a:cs typeface="Times New Roman" panose="02020603050405020304" pitchFamily="18" charset="0"/>
+              </a:rPr>
+              <a:t>Конвертация в </a:t>
+            </a:r>
+            <a:r>
+              <a:rPr lang="en-US" sz="4400" dirty="0">
+                <a:latin typeface="Times New Roman" panose="02020603050405020304" pitchFamily="18" charset="0"/>
+                <a:cs typeface="Times New Roman" panose="02020603050405020304" pitchFamily="18" charset="0"/>
+              </a:rPr>
+              <a:t>Python</a:t>
+            </a:r>
+            <a:endParaRPr lang="ru-RU" dirty="0"/>
+          </a:p>
+        </p:txBody>
+      </p:sp>
+    </p:spTree>
+    <p:extLst>
+      <p:ext uri="{BB962C8B-B14F-4D97-AF65-F5344CB8AC3E}">
+        <p14:creationId xmlns:p14="http://schemas.microsoft.com/office/powerpoint/2010/main" val="1687853922"/>
+      </p:ext>
+    </p:extLst>
+  </p:cSld>
+  <p:clrMapOvr>
+    <a:masterClrMapping/>
+  </p:clrMapOvr>
+</p:sld>
+</file>
+
+<file path=ppt/slides/slide4.xml><?xml version="1.0" encoding="utf-8"?>
+<p:sld xmlns:a="http://schemas.openxmlformats.org/drawingml/2006/main" xmlns:r="http://schemas.openxmlformats.org/officeDocument/2006/relationships" xmlns:p="http://schemas.openxmlformats.org/presentationml/2006/main">
+  <p:cSld>
+    <p:spTree>
+      <p:nvGrpSpPr>
+        <p:cNvPr id="1" name=""/>
+        <p:cNvGrpSpPr/>
+        <p:nvPr/>
+      </p:nvGrpSpPr>
+      <p:grpSpPr>
+        <a:xfrm>
+          <a:off x="0" y="0"/>
+          <a:ext cx="0" cy="0"/>
+          <a:chOff x="0" y="0"/>
+          <a:chExt cx="0" cy="0"/>
+        </a:xfrm>
+      </p:grpSpPr>
+      <p:sp>
+        <p:nvSpPr>
           <p:cNvPr id="2" name="Заголовок 1">
             <a:extLst>
               <a:ext uri="{FF2B5EF4-FFF2-40B4-BE49-F238E27FC236}">
@@ -4126,7 +5735,7 @@
           <a:p>
             <a:fld id="{5E132034-01A0-7847-98A4-B83C6CAD07E4}" type="slidenum">
               <a:rPr lang="ru-RU" smtClean="0"/>
-              <a:t>3</a:t>
+              <a:t>4</a:t>
             </a:fld>
             <a:endParaRPr lang="ru-RU"/>
           </a:p>
@@ -4205,7 +5814,7 @@
 </p:sld>
 </file>
 
-<file path=ppt/slides/slide4.xml><?xml version="1.0" encoding="utf-8"?>
+<file path=ppt/slides/slide5.xml><?xml version="1.0" encoding="utf-8"?>
 <p:sld xmlns:a="http://schemas.openxmlformats.org/drawingml/2006/main" xmlns:r="http://schemas.openxmlformats.org/officeDocument/2006/relationships" xmlns:p="http://schemas.openxmlformats.org/presentationml/2006/main">
   <p:cSld>
     <p:spTree>
@@ -4285,7 +5894,7 @@
           <a:p>
             <a:fld id="{5E132034-01A0-7847-98A4-B83C6CAD07E4}" type="slidenum">
               <a:rPr lang="ru-RU" smtClean="0"/>
-              <a:t>4</a:t>
+              <a:t>5</a:t>
             </a:fld>
             <a:endParaRPr lang="ru-RU"/>
           </a:p>
@@ -4632,7 +6241,7 @@
 </p:sld>
 </file>
 
-<file path=ppt/slides/slide5.xml><?xml version="1.0" encoding="utf-8"?>
+<file path=ppt/slides/slide6.xml><?xml version="1.0" encoding="utf-8"?>
 <p:sld xmlns:a="http://schemas.openxmlformats.org/drawingml/2006/main" xmlns:r="http://schemas.openxmlformats.org/officeDocument/2006/relationships" xmlns:p="http://schemas.openxmlformats.org/presentationml/2006/main">
   <p:cSld>
     <p:spTree>
@@ -4712,7 +6321,7 @@
           <a:p>
             <a:fld id="{5E132034-01A0-7847-98A4-B83C6CAD07E4}" type="slidenum">
               <a:rPr lang="ru-RU" smtClean="0"/>
-              <a:t>5</a:t>
+              <a:t>6</a:t>
             </a:fld>
             <a:endParaRPr lang="ru-RU"/>
           </a:p>
@@ -4832,7 +6441,7 @@
 </p:sld>
 </file>
 
-<file path=ppt/slides/slide6.xml><?xml version="1.0" encoding="utf-8"?>
+<file path=ppt/slides/slide7.xml><?xml version="1.0" encoding="utf-8"?>
 <p:sld xmlns:a="http://schemas.openxmlformats.org/drawingml/2006/main" xmlns:r="http://schemas.openxmlformats.org/officeDocument/2006/relationships" xmlns:p="http://schemas.openxmlformats.org/presentationml/2006/main">
   <p:cSld>
     <p:spTree>
@@ -4922,7 +6531,7 @@
           <a:p>
             <a:fld id="{5E132034-01A0-7847-98A4-B83C6CAD07E4}" type="slidenum">
               <a:rPr lang="ru-RU" smtClean="0"/>
-              <a:t>6</a:t>
+              <a:t>7</a:t>
             </a:fld>
             <a:endParaRPr lang="ru-RU"/>
           </a:p>
@@ -5000,7 +6609,7 @@
 </p:sld>
 </file>
 
-<file path=ppt/slides/slide7.xml><?xml version="1.0" encoding="utf-8"?>
+<file path=ppt/slides/slide8.xml><?xml version="1.0" encoding="utf-8"?>
 <p:sld xmlns:a="http://schemas.openxmlformats.org/drawingml/2006/main" xmlns:r="http://schemas.openxmlformats.org/officeDocument/2006/relationships" xmlns:p="http://schemas.openxmlformats.org/presentationml/2006/main">
   <p:cSld>
     <p:spTree>
@@ -5090,7 +6699,7 @@
           <a:p>
             <a:fld id="{5E132034-01A0-7847-98A4-B83C6CAD07E4}" type="slidenum">
               <a:rPr lang="ru-RU" smtClean="0"/>
-              <a:t>7</a:t>
+              <a:t>8</a:t>
             </a:fld>
             <a:endParaRPr lang="ru-RU"/>
           </a:p>
@@ -5167,7 +6776,7 @@
 </p:sld>
 </file>
 
-<file path=ppt/slides/slide8.xml><?xml version="1.0" encoding="utf-8"?>
+<file path=ppt/slides/slide9.xml><?xml version="1.0" encoding="utf-8"?>
 <p:sld xmlns:a="http://schemas.openxmlformats.org/drawingml/2006/main" xmlns:r="http://schemas.openxmlformats.org/officeDocument/2006/relationships" xmlns:p="http://schemas.openxmlformats.org/presentationml/2006/main">
   <p:cSld>
     <p:spTree>
@@ -5341,7 +6950,7 @@
           <a:p>
             <a:fld id="{5E132034-01A0-7847-98A4-B83C6CAD07E4}" type="slidenum">
               <a:rPr lang="ru-RU" smtClean="0"/>
-              <a:t>8</a:t>
+              <a:t>9</a:t>
             </a:fld>
             <a:endParaRPr lang="ru-RU"/>
           </a:p>
@@ -5558,215 +7167,6 @@
     <p:extLst>
       <p:ext uri="{BB962C8B-B14F-4D97-AF65-F5344CB8AC3E}">
         <p14:creationId xmlns:p14="http://schemas.microsoft.com/office/powerpoint/2010/main" val="4143863033"/>
-      </p:ext>
-    </p:extLst>
-  </p:cSld>
-  <p:clrMapOvr>
-    <a:masterClrMapping/>
-  </p:clrMapOvr>
-</p:sld>
-</file>
-
-<file path=ppt/slides/slide9.xml><?xml version="1.0" encoding="utf-8"?>
-<p:sld xmlns:a="http://schemas.openxmlformats.org/drawingml/2006/main" xmlns:r="http://schemas.openxmlformats.org/officeDocument/2006/relationships" xmlns:p="http://schemas.openxmlformats.org/presentationml/2006/main">
-  <p:cSld>
-    <p:spTree>
-      <p:nvGrpSpPr>
-        <p:cNvPr id="1" name=""/>
-        <p:cNvGrpSpPr/>
-        <p:nvPr/>
-      </p:nvGrpSpPr>
-      <p:grpSpPr>
-        <a:xfrm>
-          <a:off x="0" y="0"/>
-          <a:ext cx="0" cy="0"/>
-          <a:chOff x="0" y="0"/>
-          <a:chExt cx="0" cy="0"/>
-        </a:xfrm>
-      </p:grpSpPr>
-      <p:sp>
-        <p:nvSpPr>
-          <p:cNvPr id="2" name="Title 1">
-            <a:extLst>
-              <a:ext uri="{FF2B5EF4-FFF2-40B4-BE49-F238E27FC236}">
-                <a16:creationId xmlns:a16="http://schemas.microsoft.com/office/drawing/2014/main" id="{2DAA243D-D83B-FC72-BCED-577224ACA22D}"/>
-              </a:ext>
-            </a:extLst>
-          </p:cNvPr>
-          <p:cNvSpPr>
-            <a:spLocks noGrp="1"/>
-          </p:cNvSpPr>
-          <p:nvPr>
-            <p:ph type="title"/>
-          </p:nvPr>
-        </p:nvSpPr>
-        <p:spPr/>
-        <p:txBody>
-          <a:bodyPr/>
-          <a:lstStyle/>
-          <a:p>
-            <a:r>
-              <a:rPr lang="ru-RU" dirty="0">
-                <a:latin typeface="Times New Roman" panose="02020603050405020304" pitchFamily="18" charset="0"/>
-                <a:cs typeface="Times New Roman" panose="02020603050405020304" pitchFamily="18" charset="0"/>
-              </a:rPr>
-              <a:t>Выводы</a:t>
-            </a:r>
-          </a:p>
-        </p:txBody>
-      </p:sp>
-      <p:sp>
-        <p:nvSpPr>
-          <p:cNvPr id="3" name="Content Placeholder 2">
-            <a:extLst>
-              <a:ext uri="{FF2B5EF4-FFF2-40B4-BE49-F238E27FC236}">
-                <a16:creationId xmlns:a16="http://schemas.microsoft.com/office/drawing/2014/main" id="{E9453449-04A0-2E7B-8E34-41811020A798}"/>
-              </a:ext>
-            </a:extLst>
-          </p:cNvPr>
-          <p:cNvSpPr>
-            <a:spLocks noGrp="1"/>
-          </p:cNvSpPr>
-          <p:nvPr>
-            <p:ph idx="1"/>
-          </p:nvPr>
-        </p:nvSpPr>
-        <p:spPr/>
-        <p:txBody>
-          <a:bodyPr>
-            <a:normAutofit fontScale="92500" lnSpcReduction="10000"/>
-          </a:bodyPr>
-          <a:lstStyle/>
-          <a:p>
-            <a:pPr marL="0" indent="0" algn="just">
-              <a:buNone/>
-            </a:pPr>
-            <a:r>
-              <a:rPr lang="ru-RU" dirty="0"/>
-              <a:t>В ходе выполнения лабораторной работы был проведён анализ </a:t>
-            </a:r>
-            <a:r>
-              <a:rPr lang="en" dirty="0"/>
-              <a:t>Python-</a:t>
-            </a:r>
-            <a:r>
-              <a:rPr lang="ru-RU" dirty="0"/>
-              <a:t>программы, преобразованной и упакованной в исполняемый файл формата .</a:t>
-            </a:r>
-            <a:r>
-              <a:rPr lang="en" dirty="0"/>
-              <a:t>exe.</a:t>
-            </a:r>
-            <a:endParaRPr lang="ru-RU" dirty="0"/>
-          </a:p>
-          <a:p>
-            <a:pPr marL="0" indent="0" algn="just">
-              <a:buNone/>
-            </a:pPr>
-            <a:endParaRPr lang="en" dirty="0"/>
-          </a:p>
-          <a:p>
-            <a:pPr marL="0" indent="0" algn="just">
-              <a:buNone/>
-            </a:pPr>
-            <a:r>
-              <a:rPr lang="ru-RU" dirty="0"/>
-              <a:t>При исследовании исполняемого файла с использованием </a:t>
-            </a:r>
-            <a:r>
-              <a:rPr lang="en" dirty="0"/>
-              <a:t>Binary Ninja </a:t>
-            </a:r>
-            <a:r>
-              <a:rPr lang="ru-RU" dirty="0"/>
-              <a:t>установлено, что основная часть кода относится к загрузчику </a:t>
-            </a:r>
-            <a:r>
-              <a:rPr lang="en" dirty="0"/>
-              <a:t>PyInstaller, </a:t>
-            </a:r>
-            <a:r>
-              <a:rPr lang="ru-RU" dirty="0"/>
-              <a:t>обеспечивающему запуск программы. Пользовательская логика при этом не представлена напрямую в машинном коде.</a:t>
-            </a:r>
-          </a:p>
-          <a:p>
-            <a:pPr marL="0" indent="0" algn="just">
-              <a:buNone/>
-            </a:pPr>
-            <a:r>
-              <a:rPr lang="ru-RU" dirty="0"/>
-              <a:t>Установлено, что анализ </a:t>
-            </a:r>
-            <a:r>
-              <a:rPr lang="en" dirty="0"/>
-              <a:t>Python-</a:t>
-            </a:r>
-            <a:r>
-              <a:rPr lang="ru-RU" dirty="0"/>
-              <a:t>программы, упакованной в .</a:t>
-            </a:r>
-            <a:r>
-              <a:rPr lang="en" dirty="0"/>
-              <a:t>exe, </a:t>
-            </a:r>
-            <a:r>
-              <a:rPr lang="ru-RU" dirty="0"/>
-              <a:t>требует извлечения и декомпиляции </a:t>
-            </a:r>
-            <a:r>
-              <a:rPr lang="ru-RU" dirty="0" err="1"/>
-              <a:t>байткода</a:t>
-            </a:r>
-            <a:r>
-              <a:rPr lang="ru-RU" dirty="0"/>
-              <a:t>, поскольку пользовательская логика не представлена напрямую в бинарном виде.</a:t>
-            </a:r>
-          </a:p>
-          <a:p>
-            <a:pPr marL="0" indent="0" algn="just">
-              <a:buNone/>
-            </a:pPr>
-            <a:endParaRPr lang="ru-RU" sz="2800" dirty="0">
-              <a:latin typeface="Times New Roman" panose="02020603050405020304" pitchFamily="18" charset="0"/>
-              <a:cs typeface="Times New Roman" panose="02020603050405020304" pitchFamily="18" charset="0"/>
-            </a:endParaRPr>
-          </a:p>
-        </p:txBody>
-      </p:sp>
-      <p:sp>
-        <p:nvSpPr>
-          <p:cNvPr id="5" name="Номер слайда 4">
-            <a:extLst>
-              <a:ext uri="{FF2B5EF4-FFF2-40B4-BE49-F238E27FC236}">
-                <a16:creationId xmlns:a16="http://schemas.microsoft.com/office/drawing/2014/main" id="{9FA118D6-8476-0CC9-F9BB-E3C3F50B261C}"/>
-              </a:ext>
-            </a:extLst>
-          </p:cNvPr>
-          <p:cNvSpPr>
-            <a:spLocks noGrp="1"/>
-          </p:cNvSpPr>
-          <p:nvPr>
-            <p:ph type="sldNum" sz="quarter" idx="12"/>
-          </p:nvPr>
-        </p:nvSpPr>
-        <p:spPr/>
-        <p:txBody>
-          <a:bodyPr/>
-          <a:lstStyle/>
-          <a:p>
-            <a:fld id="{5E132034-01A0-7847-98A4-B83C6CAD07E4}" type="slidenum">
-              <a:rPr lang="ru-RU" smtClean="0"/>
-              <a:t>9</a:t>
-            </a:fld>
-            <a:endParaRPr lang="ru-RU"/>
-          </a:p>
-        </p:txBody>
-      </p:sp>
-    </p:spTree>
-    <p:extLst>
-      <p:ext uri="{BB962C8B-B14F-4D97-AF65-F5344CB8AC3E}">
-        <p14:creationId xmlns:p14="http://schemas.microsoft.com/office/powerpoint/2010/main" val="3293851703"/>
       </p:ext>
     </p:extLst>
   </p:cSld>
